--- a/ALR-DocgenTemplates/CertificateBackground_SU.pptx
+++ b/ALR-DocgenTemplates/CertificateBackground_SU.pptx
@@ -115,24 +115,24 @@
 <file path=ppt/changesInfos/changesInfo1.xml><?xml version="1.0" encoding="utf-8"?>
 <pc:chgInfo xmlns:a="http://schemas.openxmlformats.org/drawingml/2006/main" xmlns:r="http://schemas.openxmlformats.org/officeDocument/2006/relationships" xmlns:ac="http://schemas.microsoft.com/office/drawing/2013/main/command" xmlns:pc="http://schemas.microsoft.com/office/powerpoint/2013/main/command">
   <pc:docChgLst>
-    <pc:chgData name="Narendra Patil, Kiran" userId="bd8726b3-9de5-4981-82ea-44e4ceaf49c4" providerId="ADAL" clId="{05612189-DF04-46C7-8FF2-69B5171090D6}"/>
-    <pc:docChg chg="undo custSel modSld">
-      <pc:chgData name="Narendra Patil, Kiran" userId="bd8726b3-9de5-4981-82ea-44e4ceaf49c4" providerId="ADAL" clId="{05612189-DF04-46C7-8FF2-69B5171090D6}" dt="2024-08-07T10:08:46.460" v="17" actId="113"/>
+    <pc:chgData name="Narendra Patil, Kiran" userId="bd8726b3-9de5-4981-82ea-44e4ceaf49c4" providerId="ADAL" clId="{AEC3F5A0-79AE-4B5E-8160-C5BDCC55510A}"/>
+    <pc:docChg chg="modSld">
+      <pc:chgData name="Narendra Patil, Kiran" userId="bd8726b3-9de5-4981-82ea-44e4ceaf49c4" providerId="ADAL" clId="{AEC3F5A0-79AE-4B5E-8160-C5BDCC55510A}" dt="2024-08-07T10:09:43.513" v="8" actId="20577"/>
       <pc:docMkLst>
         <pc:docMk/>
       </pc:docMkLst>
       <pc:sldChg chg="modSp mod">
-        <pc:chgData name="Narendra Patil, Kiran" userId="bd8726b3-9de5-4981-82ea-44e4ceaf49c4" providerId="ADAL" clId="{05612189-DF04-46C7-8FF2-69B5171090D6}" dt="2024-08-07T10:08:46.460" v="17" actId="113"/>
+        <pc:chgData name="Narendra Patil, Kiran" userId="bd8726b3-9de5-4981-82ea-44e4ceaf49c4" providerId="ADAL" clId="{AEC3F5A0-79AE-4B5E-8160-C5BDCC55510A}" dt="2024-08-07T10:09:43.513" v="8" actId="20577"/>
         <pc:sldMkLst>
           <pc:docMk/>
           <pc:sldMk cId="1830213082" sldId="256"/>
         </pc:sldMkLst>
         <pc:spChg chg="mod">
-          <ac:chgData name="Narendra Patil, Kiran" userId="bd8726b3-9de5-4981-82ea-44e4ceaf49c4" providerId="ADAL" clId="{05612189-DF04-46C7-8FF2-69B5171090D6}" dt="2024-08-07T10:08:46.460" v="17" actId="113"/>
+          <ac:chgData name="Narendra Patil, Kiran" userId="bd8726b3-9de5-4981-82ea-44e4ceaf49c4" providerId="ADAL" clId="{AEC3F5A0-79AE-4B5E-8160-C5BDCC55510A}" dt="2024-08-07T10:09:43.513" v="8" actId="20577"/>
           <ac:spMkLst>
             <pc:docMk/>
             <pc:sldMk cId="1830213082" sldId="256"/>
-            <ac:spMk id="10" creationId="{AE09E6F9-A32A-FB75-FC6B-AFAC14566971}"/>
+            <ac:spMk id="9" creationId="{2661C2CE-7AAD-2E59-A527-EDBEF23061BD}"/>
           </ac:spMkLst>
         </pc:spChg>
       </pc:sldChg>
@@ -272,7 +272,7 @@
           <a:p>
             <a:fld id="{E0C45857-5204-4055-BBBB-5D81F6C0DEE1}" type="datetimeFigureOut">
               <a:rPr lang="en-US" smtClean="0"/>
-              <a:t>8/7/2024</a:t>
+              <a:t>9/2/2025</a:t>
             </a:fld>
             <a:endParaRPr lang="en-US"/>
           </a:p>
@@ -442,7 +442,7 @@
           <a:p>
             <a:fld id="{E0C45857-5204-4055-BBBB-5D81F6C0DEE1}" type="datetimeFigureOut">
               <a:rPr lang="en-US" smtClean="0"/>
-              <a:t>8/7/2024</a:t>
+              <a:t>9/2/2025</a:t>
             </a:fld>
             <a:endParaRPr lang="en-US"/>
           </a:p>
@@ -622,7 +622,7 @@
           <a:p>
             <a:fld id="{E0C45857-5204-4055-BBBB-5D81F6C0DEE1}" type="datetimeFigureOut">
               <a:rPr lang="en-US" smtClean="0"/>
-              <a:t>8/7/2024</a:t>
+              <a:t>9/2/2025</a:t>
             </a:fld>
             <a:endParaRPr lang="en-US"/>
           </a:p>
@@ -792,7 +792,7 @@
           <a:p>
             <a:fld id="{E0C45857-5204-4055-BBBB-5D81F6C0DEE1}" type="datetimeFigureOut">
               <a:rPr lang="en-US" smtClean="0"/>
-              <a:t>8/7/2024</a:t>
+              <a:t>9/2/2025</a:t>
             </a:fld>
             <a:endParaRPr lang="en-US"/>
           </a:p>
@@ -1036,7 +1036,7 @@
           <a:p>
             <a:fld id="{E0C45857-5204-4055-BBBB-5D81F6C0DEE1}" type="datetimeFigureOut">
               <a:rPr lang="en-US" smtClean="0"/>
-              <a:t>8/7/2024</a:t>
+              <a:t>9/2/2025</a:t>
             </a:fld>
             <a:endParaRPr lang="en-US"/>
           </a:p>
@@ -1268,7 +1268,7 @@
           <a:p>
             <a:fld id="{E0C45857-5204-4055-BBBB-5D81F6C0DEE1}" type="datetimeFigureOut">
               <a:rPr lang="en-US" smtClean="0"/>
-              <a:t>8/7/2024</a:t>
+              <a:t>9/2/2025</a:t>
             </a:fld>
             <a:endParaRPr lang="en-US"/>
           </a:p>
@@ -1635,7 +1635,7 @@
           <a:p>
             <a:fld id="{E0C45857-5204-4055-BBBB-5D81F6C0DEE1}" type="datetimeFigureOut">
               <a:rPr lang="en-US" smtClean="0"/>
-              <a:t>8/7/2024</a:t>
+              <a:t>9/2/2025</a:t>
             </a:fld>
             <a:endParaRPr lang="en-US"/>
           </a:p>
@@ -1753,7 +1753,7 @@
           <a:p>
             <a:fld id="{E0C45857-5204-4055-BBBB-5D81F6C0DEE1}" type="datetimeFigureOut">
               <a:rPr lang="en-US" smtClean="0"/>
-              <a:t>8/7/2024</a:t>
+              <a:t>9/2/2025</a:t>
             </a:fld>
             <a:endParaRPr lang="en-US"/>
           </a:p>
@@ -1848,7 +1848,7 @@
           <a:p>
             <a:fld id="{E0C45857-5204-4055-BBBB-5D81F6C0DEE1}" type="datetimeFigureOut">
               <a:rPr lang="en-US" smtClean="0"/>
-              <a:t>8/7/2024</a:t>
+              <a:t>9/2/2025</a:t>
             </a:fld>
             <a:endParaRPr lang="en-US"/>
           </a:p>
@@ -2125,7 +2125,7 @@
           <a:p>
             <a:fld id="{E0C45857-5204-4055-BBBB-5D81F6C0DEE1}" type="datetimeFigureOut">
               <a:rPr lang="en-US" smtClean="0"/>
-              <a:t>8/7/2024</a:t>
+              <a:t>9/2/2025</a:t>
             </a:fld>
             <a:endParaRPr lang="en-US"/>
           </a:p>
@@ -2382,7 +2382,7 @@
           <a:p>
             <a:fld id="{E0C45857-5204-4055-BBBB-5D81F6C0DEE1}" type="datetimeFigureOut">
               <a:rPr lang="en-US" smtClean="0"/>
-              <a:t>8/7/2024</a:t>
+              <a:t>9/2/2025</a:t>
             </a:fld>
             <a:endParaRPr lang="en-US"/>
           </a:p>
@@ -2595,7 +2595,7 @@
           <a:p>
             <a:fld id="{E0C45857-5204-4055-BBBB-5D81F6C0DEE1}" type="datetimeFigureOut">
               <a:rPr lang="en-US" smtClean="0"/>
-              <a:t>8/7/2024</a:t>
+              <a:t>9/2/2025</a:t>
             </a:fld>
             <a:endParaRPr lang="en-US"/>
           </a:p>
@@ -3076,8 +3076,8 @@
         </p:blipFill>
         <p:spPr bwMode="auto">
           <a:xfrm>
-            <a:off x="-1" y="-24015"/>
-            <a:ext cx="10244589" cy="7876292"/>
+            <a:off x="-57248" y="16575"/>
+            <a:ext cx="10125076" cy="7784407"/>
           </a:xfrm>
           <a:prstGeom prst="rect">
             <a:avLst/>
@@ -3092,48 +3092,6 @@
               </a14:hiddenFill>
             </a:ext>
           </a:extLst>
-        </p:spPr>
-      </p:pic>
-      <p:pic>
-        <p:nvPicPr>
-          <p:cNvPr id="4" name="Picture 3" descr="A black background with a black square&#10;&#10;Description automatically generated with medium confidence">
-            <a:extLst>
-              <a:ext uri="{FF2B5EF4-FFF2-40B4-BE49-F238E27FC236}">
-                <a16:creationId xmlns:a16="http://schemas.microsoft.com/office/drawing/2014/main" id="{CE4A4484-A0FE-26E9-3D9D-75AB1250B9DD}"/>
-              </a:ext>
-            </a:extLst>
-          </p:cNvPr>
-          <p:cNvPicPr>
-            <a:picLocks noChangeAspect="1"/>
-          </p:cNvPicPr>
-          <p:nvPr/>
-        </p:nvPicPr>
-        <p:blipFill>
-          <a:blip r:embed="rId4">
-            <a:duotone>
-              <a:schemeClr val="accent3">
-                <a:shade val="45000"/>
-                <a:satMod val="135000"/>
-              </a:schemeClr>
-              <a:prstClr val="white"/>
-            </a:duotone>
-          </a:blip>
-          <a:stretch>
-            <a:fillRect/>
-          </a:stretch>
-        </p:blipFill>
-        <p:spPr>
-          <a:xfrm>
-            <a:off x="2270224" y="2132898"/>
-            <a:ext cx="1181100" cy="1181100"/>
-          </a:xfrm>
-          <a:prstGeom prst="rect">
-            <a:avLst/>
-          </a:prstGeom>
-          <a:noFill/>
-          <a:ln>
-            <a:noFill/>
-          </a:ln>
         </p:spPr>
       </p:pic>
       <p:sp>
@@ -3248,10 +3206,10 @@
       </p:pic>
       <p:sp>
         <p:nvSpPr>
-          <p:cNvPr id="7" name="Rectangle 6">
+          <p:cNvPr id="3" name="Rectangle 2">
             <a:extLst>
               <a:ext uri="{FF2B5EF4-FFF2-40B4-BE49-F238E27FC236}">
-                <a16:creationId xmlns:a16="http://schemas.microsoft.com/office/drawing/2014/main" id="{C65B35FE-9DC8-7407-066A-912C47215746}"/>
+                <a16:creationId xmlns:a16="http://schemas.microsoft.com/office/drawing/2014/main" id="{25FF7A25-630E-BABB-0D71-6D7785719140}"/>
               </a:ext>
             </a:extLst>
           </p:cNvPr>
@@ -3262,7 +3220,7 @@
         </p:nvSpPr>
         <p:spPr bwMode="auto">
           <a:xfrm>
-            <a:off x="896585" y="-457200"/>
+            <a:off x="828851" y="-445911"/>
             <a:ext cx="10058400" cy="457200"/>
           </a:xfrm>
           <a:prstGeom prst="rect">
@@ -3317,10 +3275,79 @@
       </p:sp>
       <p:sp>
         <p:nvSpPr>
-          <p:cNvPr id="9" name="Rectangle 8">
+          <p:cNvPr id="7" name="Rectangle 6">
             <a:extLst>
               <a:ext uri="{FF2B5EF4-FFF2-40B4-BE49-F238E27FC236}">
-                <a16:creationId xmlns:a16="http://schemas.microsoft.com/office/drawing/2014/main" id="{1D81A896-70AE-1C4A-5981-728711813421}"/>
+                <a16:creationId xmlns:a16="http://schemas.microsoft.com/office/drawing/2014/main" id="{FDF12BCC-3697-7CB0-2BA5-CE188BFEFEBE}"/>
+              </a:ext>
+            </a:extLst>
+          </p:cNvPr>
+          <p:cNvSpPr>
+            <a:spLocks noChangeArrowheads="1"/>
+          </p:cNvSpPr>
+          <p:nvPr/>
+        </p:nvSpPr>
+        <p:spPr bwMode="auto">
+          <a:xfrm>
+            <a:off x="806273" y="-445911"/>
+            <a:ext cx="10058400" cy="457200"/>
+          </a:xfrm>
+          <a:prstGeom prst="rect">
+            <a:avLst/>
+          </a:prstGeom>
+          <a:noFill/>
+          <a:ln>
+            <a:noFill/>
+          </a:ln>
+          <a:effectLst/>
+          <a:extLst>
+            <a:ext uri="{909E8E84-426E-40DD-AFC4-6F175D3DCCD1}">
+              <a14:hiddenFill xmlns:a14="http://schemas.microsoft.com/office/drawing/2010/main">
+                <a:solidFill>
+                  <a:schemeClr val="accent1"/>
+                </a:solidFill>
+              </a14:hiddenFill>
+            </a:ext>
+            <a:ext uri="{91240B29-F687-4F45-9708-019B960494DF}">
+              <a14:hiddenLine xmlns:a14="http://schemas.microsoft.com/office/drawing/2010/main" w="9525">
+                <a:solidFill>
+                  <a:schemeClr val="tx1"/>
+                </a:solidFill>
+                <a:miter lim="800000"/>
+                <a:headEnd/>
+                <a:tailEnd/>
+              </a14:hiddenLine>
+            </a:ext>
+            <a:ext uri="{AF507438-7753-43E0-B8FC-AC1667EBCBE1}">
+              <a14:hiddenEffects xmlns:a14="http://schemas.microsoft.com/office/drawing/2010/main">
+                <a:effectLst>
+                  <a:outerShdw dist="35921" dir="2700000" algn="ctr" rotWithShape="0">
+                    <a:schemeClr val="bg2"/>
+                  </a:outerShdw>
+                </a:effectLst>
+              </a14:hiddenEffects>
+            </a:ext>
+          </a:extLst>
+        </p:spPr>
+        <p:txBody>
+          <a:bodyPr vert="horz" wrap="none" lIns="91440" tIns="45720" rIns="91440" bIns="45720" numCol="1" anchor="ctr" anchorCtr="0" compatLnSpc="1">
+            <a:prstTxWarp prst="textNoShape">
+              <a:avLst/>
+            </a:prstTxWarp>
+            <a:spAutoFit/>
+          </a:bodyPr>
+          <a:lstStyle/>
+          <a:p>
+            <a:endParaRPr lang="en-US"/>
+          </a:p>
+        </p:txBody>
+      </p:sp>
+      <p:sp>
+        <p:nvSpPr>
+          <p:cNvPr id="8" name="Rectangle 7">
+            <a:extLst>
+              <a:ext uri="{FF2B5EF4-FFF2-40B4-BE49-F238E27FC236}">
+                <a16:creationId xmlns:a16="http://schemas.microsoft.com/office/drawing/2014/main" id="{38930030-9863-B237-D6BD-31AFCF5E87E4}"/>
               </a:ext>
               <a:ext uri="{C183D7F6-B498-43B3-948B-1728B52AA6E4}">
                 <adec:decorative xmlns:adec="http://schemas.microsoft.com/office/drawing/2017/decorative" val="1"/>
@@ -3338,7 +3365,7 @@
         </p:nvSpPr>
         <p:spPr bwMode="white">
           <a:xfrm>
-            <a:off x="-1233967" y="-6003"/>
+            <a:off x="-1324279" y="5286"/>
             <a:ext cx="12188952" cy="6858000"/>
           </a:xfrm>
           <a:prstGeom prst="rect">
@@ -3470,10 +3497,10 @@
       </p:sp>
       <p:sp>
         <p:nvSpPr>
-          <p:cNvPr id="10" name="TextBox 9">
+          <p:cNvPr id="9" name="TextBox 8">
             <a:extLst>
               <a:ext uri="{FF2B5EF4-FFF2-40B4-BE49-F238E27FC236}">
-                <a16:creationId xmlns:a16="http://schemas.microsoft.com/office/drawing/2014/main" id="{AE09E6F9-A32A-FB75-FC6B-AFAC14566971}"/>
+                <a16:creationId xmlns:a16="http://schemas.microsoft.com/office/drawing/2014/main" id="{2661C2CE-7AAD-2E59-A527-EDBEF23061BD}"/>
               </a:ext>
             </a:extLst>
           </p:cNvPr>
@@ -3482,8 +3509,8 @@
         </p:nvSpPr>
         <p:spPr>
           <a:xfrm>
-            <a:off x="2352412" y="2256626"/>
-            <a:ext cx="7406360" cy="3976923"/>
+            <a:off x="2154614" y="1695910"/>
+            <a:ext cx="7999664" cy="1865382"/>
           </a:xfrm>
           <a:prstGeom prst="rect">
             <a:avLst/>
@@ -3514,7 +3541,7 @@
               <a:t>{{</a:t>
             </a:r>
             <a:r>
-              <a:rPr lang="en-US" sz="2400" b="1" dirty="0" err="1">
+              <a:rPr lang="en-US" sz="2200" b="1" dirty="0" err="1">
                 <a:solidFill>
                   <a:srgbClr val="3B305B"/>
                 </a:solidFill>
@@ -3615,7 +3642,7 @@
               </a:spcAft>
             </a:pPr>
             <a:r>
-              <a:rPr lang="en-US" dirty="0">
+              <a:rPr lang="en-US" sz="1600" dirty="0">
                 <a:solidFill>
                   <a:srgbClr val="3B305B"/>
                 </a:solidFill>
@@ -3627,7 +3654,7 @@
               <a:t>{{</a:t>
             </a:r>
             <a:r>
-              <a:rPr lang="en-US" dirty="0" err="1">
+              <a:rPr lang="en-US" sz="1600" dirty="0" err="1">
                 <a:solidFill>
                   <a:srgbClr val="3B305B"/>
                 </a:solidFill>
@@ -3639,18 +3666,7 @@
               <a:t>ResidenceAddress</a:t>
             </a:r>
             <a:r>
-              <a:rPr lang="en-US" dirty="0">
-                <a:solidFill>
-                  <a:srgbClr val="3B305B"/>
-                </a:solidFill>
-                <a:latin typeface="BC Sans"/>
-                <a:ea typeface="Verdana" panose="020B0604030504040204" pitchFamily="34" charset="0"/>
-                <a:cs typeface="Verdana" panose="020B0604030504040204" pitchFamily="34" charset="0"/>
-              </a:rPr>
-              <a:t>}</a:t>
-            </a:r>
-            <a:r>
-              <a:rPr lang="en-US" dirty="0">
+              <a:rPr lang="en-US" sz="1600" dirty="0">
                 <a:solidFill>
                   <a:srgbClr val="3B305B"/>
                 </a:solidFill>
@@ -3659,7 +3675,7 @@
                 <a:ea typeface="Verdana" panose="020B0604030504040204" pitchFamily="34" charset="0"/>
                 <a:cs typeface="Verdana" panose="020B0604030504040204" pitchFamily="34" charset="0"/>
               </a:rPr>
-              <a:t>}</a:t>
+              <a:t>}}</a:t>
             </a:r>
           </a:p>
           <a:p>
@@ -3677,45 +3693,47 @@
             <a:r>
               <a:rPr lang="en-US" sz="1400" dirty="0">
                 <a:solidFill>
-                  <a:srgbClr val="BE2022"/>
+                  <a:srgbClr val="C00000"/>
                 </a:solidFill>
                 <a:effectLst/>
                 <a:latin typeface="BC Sans"/>
                 <a:ea typeface="Verdana" panose="020B0604030504040204" pitchFamily="34" charset="0"/>
                 <a:cs typeface="Verdana" panose="020B0604030504040204" pitchFamily="34" charset="0"/>
               </a:rPr>
-              <a:t>Class</a:t>
-            </a:r>
-            <a:r>
-              <a:rPr lang="en-US" sz="1400" dirty="0">
-                <a:solidFill>
-                  <a:srgbClr val="BE2022"/>
-                </a:solidFill>
+              <a:t>Class: {{</a:t>
+            </a:r>
+            <a:r>
+              <a:rPr lang="en-US" sz="1400" dirty="0" err="1">
+                <a:solidFill>
+                  <a:srgbClr val="C00000"/>
+                </a:solidFill>
+                <a:effectLst/>
                 <a:latin typeface="BC Sans"/>
                 <a:ea typeface="Verdana" panose="020B0604030504040204" pitchFamily="34" charset="0"/>
+                <a:cs typeface="Verdana" panose="020B0604030504040204" pitchFamily="34" charset="0"/>
               </a:rPr>
-              <a:t>: {{</a:t>
-            </a:r>
-            <a:r>
-              <a:rPr lang="en-US" sz="1400" dirty="0" err="1">
-                <a:solidFill>
-                  <a:srgbClr val="BE2022"/>
+              <a:t>ResidenceClassType</a:t>
+            </a:r>
+            <a:r>
+              <a:rPr lang="en-US" sz="1400" dirty="0">
+                <a:solidFill>
+                  <a:srgbClr val="C00000"/>
                 </a:solidFill>
                 <a:latin typeface="BC Sans"/>
                 <a:ea typeface="Verdana" panose="020B0604030504040204" pitchFamily="34" charset="0"/>
+                <a:cs typeface="Verdana" panose="020B0604030504040204" pitchFamily="34" charset="0"/>
               </a:rPr>
-              <a:t>ResidenceClassType</a:t>
-            </a:r>
-            <a:r>
-              <a:rPr lang="en-US" sz="1400" dirty="0">
-                <a:solidFill>
-                  <a:srgbClr val="BE2022"/>
-                </a:solidFill>
-                <a:latin typeface="BC Sans"/>
-                <a:ea typeface="Verdana" panose="020B0604030504040204" pitchFamily="34" charset="0"/>
-              </a:rPr>
-              <a:t>}} </a:t>
-            </a:r>
+              <a:t>}}</a:t>
+            </a:r>
+            <a:endParaRPr lang="en-US" sz="1400" dirty="0">
+              <a:solidFill>
+                <a:srgbClr val="C00000"/>
+              </a:solidFill>
+              <a:effectLst/>
+              <a:latin typeface="BC Sans"/>
+              <a:ea typeface="Verdana" panose="020B0604030504040204" pitchFamily="34" charset="0"/>
+              <a:cs typeface="Verdana" panose="020B0604030504040204" pitchFamily="34" charset="0"/>
+            </a:endParaRPr>
           </a:p>
           <a:p>
             <a:pPr marL="1496060" marR="3183255">
@@ -3810,149 +3828,15 @@
               </a:rPr>
               <a:t>}}</a:t>
             </a:r>
-            <a:endParaRPr lang="en-US" sz="1400" dirty="0">
-              <a:latin typeface="BC Sans"/>
-              <a:ea typeface="Verdana" panose="020B0604030504040204" pitchFamily="34" charset="0"/>
-              <a:cs typeface="Verdana" panose="020B0604030504040204" pitchFamily="34" charset="0"/>
-            </a:endParaRPr>
-          </a:p>
-          <a:p>
-            <a:pPr marL="1496060" marR="3183255">
-              <a:lnSpc>
-                <a:spcPct val="123000"/>
-              </a:lnSpc>
-              <a:spcBef>
-                <a:spcPts val="515"/>
-              </a:spcBef>
-            </a:pPr>
-            <a:endParaRPr lang="en-US" sz="1400" dirty="0">
-              <a:latin typeface="BC Sans"/>
-              <a:ea typeface="Verdana" panose="020B0604030504040204" pitchFamily="34" charset="0"/>
-              <a:cs typeface="Verdana" panose="020B0604030504040204" pitchFamily="34" charset="0"/>
-            </a:endParaRPr>
-          </a:p>
-          <a:p>
-            <a:pPr marL="1496060" marR="3183255">
-              <a:lnSpc>
-                <a:spcPct val="123000"/>
-              </a:lnSpc>
-              <a:spcBef>
-                <a:spcPts val="515"/>
-              </a:spcBef>
-            </a:pPr>
-            <a:r>
-              <a:rPr lang="en-US" sz="1400" dirty="0">
-                <a:solidFill>
-                  <a:srgbClr val="3B305B"/>
-                </a:solidFill>
-                <a:latin typeface="BC Sans"/>
-                <a:ea typeface="Verdana" panose="020B0604030504040204" pitchFamily="34" charset="0"/>
-              </a:rPr>
-              <a:t>Assisted Living Service(s): {{</a:t>
-            </a:r>
-            <a:r>
-              <a:rPr lang="en-US" sz="1400" b="0" dirty="0">
-                <a:solidFill>
-                  <a:srgbClr val="A31515"/>
-                </a:solidFill>
-                <a:effectLst/>
-                <a:latin typeface="Consolas" panose="020B0609020204030204" pitchFamily="49" charset="0"/>
-              </a:rPr>
-              <a:t>Services</a:t>
-            </a:r>
-            <a:r>
-              <a:rPr lang="en-US" sz="1400" dirty="0">
-                <a:solidFill>
-                  <a:srgbClr val="3B305B"/>
-                </a:solidFill>
-                <a:latin typeface="BC Sans"/>
-                <a:ea typeface="Verdana" panose="020B0604030504040204" pitchFamily="34" charset="0"/>
-              </a:rPr>
-              <a:t>}}</a:t>
-            </a:r>
-          </a:p>
-          <a:p>
-            <a:pPr marL="1496060" marR="3183255">
-              <a:lnSpc>
-                <a:spcPct val="123000"/>
-              </a:lnSpc>
-              <a:spcBef>
-                <a:spcPts val="515"/>
-              </a:spcBef>
-            </a:pPr>
-            <a:endParaRPr lang="en-US" sz="1400" dirty="0">
-              <a:solidFill>
-                <a:srgbClr val="3B305B"/>
-              </a:solidFill>
-              <a:latin typeface="BC Sans"/>
-              <a:ea typeface="Verdana" panose="020B0604030504040204" pitchFamily="34" charset="0"/>
-            </a:endParaRPr>
-          </a:p>
-          <a:p>
-            <a:pPr marL="1496060" marR="3183255">
-              <a:lnSpc>
-                <a:spcPct val="123000"/>
-              </a:lnSpc>
-              <a:spcBef>
-                <a:spcPts val="515"/>
-              </a:spcBef>
-            </a:pPr>
-            <a:r>
-              <a:rPr lang="en-US" sz="1400" b="1" dirty="0">
-                <a:solidFill>
-                  <a:srgbClr val="3B305B"/>
-                </a:solidFill>
-                <a:latin typeface="BC Sans"/>
-                <a:ea typeface="Verdana" panose="020B0604030504040204" pitchFamily="34" charset="0"/>
-              </a:rPr>
-              <a:t>CONDITIONS: {{</a:t>
-            </a:r>
-            <a:r>
-              <a:rPr lang="en-US" sz="1400" b="1" dirty="0" err="1">
-                <a:solidFill>
-                  <a:srgbClr val="3B305B"/>
-                </a:solidFill>
-                <a:latin typeface="BC Sans"/>
-                <a:ea typeface="Verdana" panose="020B0604030504040204" pitchFamily="34" charset="0"/>
-              </a:rPr>
-              <a:t>ConditionAndDescription</a:t>
-            </a:r>
-            <a:r>
-              <a:rPr lang="en-US" sz="1400" b="1" dirty="0">
-                <a:solidFill>
-                  <a:srgbClr val="3B305B"/>
-                </a:solidFill>
-                <a:latin typeface="BC Sans"/>
-                <a:ea typeface="Verdana" panose="020B0604030504040204" pitchFamily="34" charset="0"/>
-              </a:rPr>
-              <a:t>}}</a:t>
-            </a:r>
-            <a:r>
-              <a:rPr lang="en-US" sz="1400" dirty="0">
-                <a:solidFill>
-                  <a:srgbClr val="3B305B"/>
-                </a:solidFill>
-                <a:latin typeface="BC Sans"/>
-                <a:ea typeface="Verdana" panose="020B0604030504040204" pitchFamily="34" charset="0"/>
-              </a:rPr>
-              <a:t>{{ConditionAndDescription1}}</a:t>
-            </a:r>
-            <a:endParaRPr lang="en-CA" sz="1400" dirty="0">
-              <a:solidFill>
-                <a:srgbClr val="3B305B"/>
-              </a:solidFill>
-              <a:latin typeface="BC Sans"/>
-              <a:ea typeface="Verdana" panose="020B0604030504040204" pitchFamily="34" charset="0"/>
-            </a:endParaRPr>
-          </a:p>
-        </p:txBody>
-      </p:sp>
-      <p:sp>
-        <p:nvSpPr>
-          <p:cNvPr id="11" name="TextBox 10">
+          </a:p>
+        </p:txBody>
+      </p:sp>
+      <p:sp>
+        <p:nvSpPr>
+          <p:cNvPr id="10" name="TextBox 9">
             <a:extLst>
               <a:ext uri="{FF2B5EF4-FFF2-40B4-BE49-F238E27FC236}">
-                <a16:creationId xmlns:a16="http://schemas.microsoft.com/office/drawing/2014/main" id="{E3F8C1F6-8E7B-B53B-8ACF-58488BCC88A6}"/>
+                <a16:creationId xmlns:a16="http://schemas.microsoft.com/office/drawing/2014/main" id="{F5EFC51F-4E8E-3399-8BFC-6415F21F1C0F}"/>
               </a:ext>
             </a:extLst>
           </p:cNvPr>
@@ -3961,8 +3845,8 @@
         </p:nvSpPr>
         <p:spPr>
           <a:xfrm>
-            <a:off x="1725930" y="769835"/>
-            <a:ext cx="8518659" cy="461665"/>
+            <a:off x="1684421" y="676025"/>
+            <a:ext cx="8469856" cy="430887"/>
           </a:xfrm>
           <a:prstGeom prst="rect">
             <a:avLst/>
@@ -3981,7 +3865,7 @@
               </a:spcBef>
             </a:pPr>
             <a:r>
-              <a:rPr lang="en-US" sz="2400" b="1" dirty="0">
+              <a:rPr lang="en-US" sz="2200" b="1" dirty="0">
                 <a:solidFill>
                   <a:srgbClr val="3B305B"/>
                 </a:solidFill>
@@ -3997,10 +3881,10 @@
       </p:sp>
       <p:sp>
         <p:nvSpPr>
-          <p:cNvPr id="12" name="TextBox 11">
+          <p:cNvPr id="11" name="TextBox 10">
             <a:extLst>
               <a:ext uri="{FF2B5EF4-FFF2-40B4-BE49-F238E27FC236}">
-                <a16:creationId xmlns:a16="http://schemas.microsoft.com/office/drawing/2014/main" id="{4AA98B56-8D57-C412-8C4C-5E7E29D7500E}"/>
+                <a16:creationId xmlns:a16="http://schemas.microsoft.com/office/drawing/2014/main" id="{8A9FF3DB-1D54-9425-AF80-A446AE7C3436}"/>
               </a:ext>
             </a:extLst>
           </p:cNvPr>
@@ -4009,8 +3893,8 @@
         </p:nvSpPr>
         <p:spPr>
           <a:xfrm>
-            <a:off x="6007749" y="6475123"/>
-            <a:ext cx="6093994" cy="1477328"/>
+            <a:off x="6149710" y="6486412"/>
+            <a:ext cx="2442411" cy="738664"/>
           </a:xfrm>
           <a:prstGeom prst="rect">
             <a:avLst/>
@@ -4023,106 +3907,74 @@
           </a:bodyPr>
           <a:lstStyle/>
           <a:p>
-            <a:pPr marL="0" algn="l" rtl="0" eaLnBrk="1" fontAlgn="t" latinLnBrk="0" hangingPunct="1">
-              <a:spcBef>
-                <a:spcPts val="0"/>
-              </a:spcBef>
-              <a:spcAft>
-                <a:spcPts val="0"/>
-              </a:spcAft>
-            </a:pPr>
-            <a:endParaRPr lang="en-US" sz="1800" b="1" i="0" u="none" strike="noStrike" kern="1200" dirty="0">
-              <a:solidFill>
-                <a:srgbClr val="3B305B"/>
-              </a:solidFill>
-              <a:effectLst/>
-              <a:latin typeface="BC Sans"/>
-              <a:ea typeface="Verdana" panose="020B0604030504040204" pitchFamily="34" charset="0"/>
-              <a:cs typeface="Verdana" panose="020B0604030504040204" pitchFamily="34" charset="0"/>
-            </a:endParaRPr>
-          </a:p>
-          <a:p>
-            <a:pPr marL="0" algn="l" rtl="0" eaLnBrk="1" fontAlgn="t" latinLnBrk="0" hangingPunct="1">
-              <a:spcBef>
-                <a:spcPts val="0"/>
-              </a:spcBef>
-              <a:spcAft>
-                <a:spcPts val="0"/>
-              </a:spcAft>
-            </a:pPr>
-            <a:endParaRPr lang="en-US" b="1" dirty="0">
-              <a:solidFill>
-                <a:srgbClr val="3B305B"/>
-              </a:solidFill>
-              <a:latin typeface="BC Sans"/>
-              <a:ea typeface="Verdana" panose="020B0604030504040204" pitchFamily="34" charset="0"/>
-              <a:cs typeface="Verdana" panose="020B0604030504040204" pitchFamily="34" charset="0"/>
-            </a:endParaRPr>
-          </a:p>
-          <a:p>
-            <a:pPr marL="0" algn="l" rtl="0" eaLnBrk="1" fontAlgn="t" latinLnBrk="0" hangingPunct="1">
-              <a:spcBef>
-                <a:spcPts val="0"/>
-              </a:spcBef>
-              <a:spcAft>
-                <a:spcPts val="0"/>
-              </a:spcAft>
-            </a:pPr>
-            <a:endParaRPr lang="en-US" sz="1800" b="1" i="0" u="none" strike="noStrike" kern="1200" dirty="0">
-              <a:solidFill>
-                <a:srgbClr val="3B305B"/>
-              </a:solidFill>
-              <a:effectLst/>
-              <a:latin typeface="BC Sans"/>
-              <a:ea typeface="Verdana" panose="020B0604030504040204" pitchFamily="34" charset="0"/>
-              <a:cs typeface="Verdana" panose="020B0604030504040204" pitchFamily="34" charset="0"/>
-            </a:endParaRPr>
-          </a:p>
-          <a:p>
-            <a:pPr marL="0" algn="l" rtl="0" eaLnBrk="1" fontAlgn="t" latinLnBrk="0" hangingPunct="1">
-              <a:spcBef>
-                <a:spcPts val="0"/>
-              </a:spcBef>
-              <a:spcAft>
-                <a:spcPts val="0"/>
-              </a:spcAft>
-            </a:pPr>
-            <a:endParaRPr lang="en-US" b="1" dirty="0">
-              <a:solidFill>
-                <a:srgbClr val="3B305B"/>
-              </a:solidFill>
-              <a:latin typeface="BC Sans"/>
-              <a:ea typeface="Verdana" panose="020B0604030504040204" pitchFamily="34" charset="0"/>
-              <a:cs typeface="Verdana" panose="020B0604030504040204" pitchFamily="34" charset="0"/>
-            </a:endParaRPr>
-          </a:p>
-          <a:p>
-            <a:pPr marL="0" algn="l" rtl="0" eaLnBrk="1" fontAlgn="t" latinLnBrk="0" hangingPunct="1">
-              <a:spcBef>
-                <a:spcPts val="0"/>
-              </a:spcBef>
-              <a:spcAft>
-                <a:spcPts val="0"/>
-              </a:spcAft>
-            </a:pPr>
-            <a:endParaRPr lang="en-US" sz="1800" b="1" i="0" u="none" strike="noStrike" kern="1200" dirty="0">
-              <a:solidFill>
-                <a:srgbClr val="3B305B"/>
-              </a:solidFill>
-              <a:effectLst/>
-              <a:latin typeface="BC Sans"/>
-              <a:ea typeface="Verdana" panose="020B0604030504040204" pitchFamily="34" charset="0"/>
-              <a:cs typeface="Verdana" panose="020B0604030504040204" pitchFamily="34" charset="0"/>
-            </a:endParaRPr>
+            <a:r>
+              <a:rPr lang="en-US" sz="1400" dirty="0">
+                <a:solidFill>
+                  <a:srgbClr val="3B305B"/>
+                </a:solidFill>
+                <a:latin typeface="BC Sans"/>
+                <a:ea typeface="Verdana" panose="020B0604030504040204" pitchFamily="34" charset="0"/>
+                <a:cs typeface="Verdana" panose="020B0604030504040204" pitchFamily="34" charset="0"/>
+              </a:rPr>
+              <a:t>Effective Date:	</a:t>
+            </a:r>
+            <a:r>
+              <a:rPr lang="en-US" sz="1400" b="1" dirty="0">
+                <a:solidFill>
+                  <a:srgbClr val="3B305B"/>
+                </a:solidFill>
+                <a:latin typeface="BC Sans"/>
+                <a:ea typeface="Verdana" panose="020B0604030504040204" pitchFamily="34" charset="0"/>
+                <a:cs typeface="Verdana" panose="020B0604030504040204" pitchFamily="34" charset="0"/>
+              </a:rPr>
+              <a:t> </a:t>
+            </a:r>
+          </a:p>
+          <a:p>
+            <a:r>
+              <a:rPr lang="en-US" sz="1400" dirty="0">
+                <a:solidFill>
+                  <a:srgbClr val="3B305B"/>
+                </a:solidFill>
+                <a:latin typeface="BC Sans"/>
+                <a:ea typeface="Verdana" panose="020B0604030504040204" pitchFamily="34" charset="0"/>
+                <a:cs typeface="Verdana" panose="020B0604030504040204" pitchFamily="34" charset="0"/>
+              </a:rPr>
+              <a:t>Expiry Date:	</a:t>
+            </a:r>
+          </a:p>
+          <a:p>
+            <a:r>
+              <a:rPr lang="en-US" sz="1400" dirty="0">
+                <a:solidFill>
+                  <a:srgbClr val="3B305B"/>
+                </a:solidFill>
+                <a:latin typeface="BC Sans"/>
+                <a:ea typeface="Verdana" panose="020B0604030504040204" pitchFamily="34" charset="0"/>
+                <a:cs typeface="Verdana" panose="020B0604030504040204" pitchFamily="34" charset="0"/>
+              </a:rPr>
+              <a:t>Registration #: </a:t>
+            </a:r>
+            <a:r>
+              <a:rPr lang="en-US" sz="1400" b="1" dirty="0">
+                <a:solidFill>
+                  <a:srgbClr val="3B305B"/>
+                </a:solidFill>
+                <a:latin typeface="BC Sans"/>
+                <a:ea typeface="Verdana" panose="020B0604030504040204" pitchFamily="34" charset="0"/>
+                <a:cs typeface="Verdana" panose="020B0604030504040204" pitchFamily="34" charset="0"/>
+              </a:rPr>
+              <a:t>  </a:t>
+            </a:r>
           </a:p>
         </p:txBody>
       </p:sp>
       <p:cxnSp>
         <p:nvCxnSpPr>
-          <p:cNvPr id="13" name="Straight Connector 12">
+          <p:cNvPr id="12" name="Straight Connector 11">
             <a:extLst>
               <a:ext uri="{FF2B5EF4-FFF2-40B4-BE49-F238E27FC236}">
-                <a16:creationId xmlns:a16="http://schemas.microsoft.com/office/drawing/2014/main" id="{96F0382A-EEAF-B222-9C2B-DF941535EC7C}"/>
+                <a16:creationId xmlns:a16="http://schemas.microsoft.com/office/drawing/2014/main" id="{9E69CE67-3BC0-BEE1-A892-011A2413FCCD}"/>
               </a:ext>
             </a:extLst>
           </p:cNvPr>
@@ -4133,8 +3985,8 @@
         </p:nvCxnSpPr>
         <p:spPr>
           <a:xfrm>
-            <a:off x="3332747" y="1374380"/>
-            <a:ext cx="6316579" cy="0"/>
+            <a:off x="3246120" y="1289304"/>
+            <a:ext cx="6035040" cy="0"/>
           </a:xfrm>
           <a:prstGeom prst="line">
             <a:avLst/>
@@ -4162,10 +4014,10 @@
       </p:cxnSp>
       <p:sp>
         <p:nvSpPr>
-          <p:cNvPr id="14" name="TextBox 13">
+          <p:cNvPr id="13" name="TextBox 12">
             <a:extLst>
               <a:ext uri="{FF2B5EF4-FFF2-40B4-BE49-F238E27FC236}">
-                <a16:creationId xmlns:a16="http://schemas.microsoft.com/office/drawing/2014/main" id="{3ED2790C-766D-B7AB-CC46-4520D399C660}"/>
+                <a16:creationId xmlns:a16="http://schemas.microsoft.com/office/drawing/2014/main" id="{BB2FDA4E-6642-1EF8-1977-F04C03ED1155}"/>
               </a:ext>
             </a:extLst>
           </p:cNvPr>
@@ -4174,7 +4026,7 @@
         </p:nvSpPr>
         <p:spPr>
           <a:xfrm>
-            <a:off x="3096446" y="6897998"/>
+            <a:off x="3006134" y="6909287"/>
             <a:ext cx="6207918" cy="307777"/>
           </a:xfrm>
           <a:prstGeom prst="rect">
@@ -4197,17 +4049,17 @@
                 <a:ea typeface="Verdana" panose="020B0604030504040204" pitchFamily="34" charset="0"/>
                 <a:cs typeface="Verdana" panose="020B0604030504040204" pitchFamily="34" charset="0"/>
               </a:rPr>
-              <a:t>Assisted Living Registrar </a:t>
-            </a:r>
-          </a:p>
-        </p:txBody>
-      </p:sp>
-      <p:sp>
-        <p:nvSpPr>
-          <p:cNvPr id="3" name="TextBox 10">
+              <a:t>Assisted Living Registrar  </a:t>
+            </a:r>
+          </a:p>
+        </p:txBody>
+      </p:sp>
+      <p:sp>
+        <p:nvSpPr>
+          <p:cNvPr id="2" name="TextBox 1">
             <a:extLst>
               <a:ext uri="{FF2B5EF4-FFF2-40B4-BE49-F238E27FC236}">
-                <a16:creationId xmlns:a16="http://schemas.microsoft.com/office/drawing/2014/main" id="{8A9FF3DB-1D54-9425-AF80-A446AE7C3436}"/>
+                <a16:creationId xmlns:a16="http://schemas.microsoft.com/office/drawing/2014/main" id="{7F5DD1A2-F913-2C20-5994-3746117834BE}"/>
               </a:ext>
             </a:extLst>
           </p:cNvPr>
@@ -4216,8 +4068,254 @@
         </p:nvSpPr>
         <p:spPr>
           <a:xfrm>
-            <a:off x="5839646" y="6467111"/>
-            <a:ext cx="2438080" cy="738664"/>
+            <a:off x="7383135" y="6478400"/>
+            <a:ext cx="2683618" cy="738664"/>
+          </a:xfrm>
+          <a:prstGeom prst="rect">
+            <a:avLst/>
+          </a:prstGeom>
+          <a:noFill/>
+        </p:spPr>
+        <p:txBody>
+          <a:bodyPr wrap="square">
+            <a:spAutoFit/>
+          </a:bodyPr>
+          <a:lstStyle/>
+          <a:p>
+            <a:r>
+              <a:rPr lang="en-US" sz="1400" b="1" dirty="0">
+                <a:solidFill>
+                  <a:srgbClr val="3B305B"/>
+                </a:solidFill>
+                <a:latin typeface="BC Sans"/>
+                <a:ea typeface="Verdana" panose="020B0604030504040204" pitchFamily="34" charset="0"/>
+                <a:cs typeface="Verdana" panose="020B0604030504040204" pitchFamily="34" charset="0"/>
+              </a:rPr>
+              <a:t>   {{</a:t>
+            </a:r>
+            <a:r>
+              <a:rPr lang="en-US" sz="1400" b="1" dirty="0" err="1">
+                <a:solidFill>
+                  <a:srgbClr val="3B305B"/>
+                </a:solidFill>
+                <a:latin typeface="BC Sans"/>
+                <a:ea typeface="Verdana" panose="020B0604030504040204" pitchFamily="34" charset="0"/>
+                <a:cs typeface="Verdana" panose="020B0604030504040204" pitchFamily="34" charset="0"/>
+              </a:rPr>
+              <a:t>CertificateEffectiveDate</a:t>
+            </a:r>
+            <a:r>
+              <a:rPr lang="en-US" sz="1400" b="1" dirty="0">
+                <a:solidFill>
+                  <a:srgbClr val="3B305B"/>
+                </a:solidFill>
+                <a:latin typeface="BC Sans"/>
+                <a:ea typeface="Verdana" panose="020B0604030504040204" pitchFamily="34" charset="0"/>
+                <a:cs typeface="Verdana" panose="020B0604030504040204" pitchFamily="34" charset="0"/>
+              </a:rPr>
+              <a:t>}}       </a:t>
+            </a:r>
+          </a:p>
+          <a:p>
+            <a:r>
+              <a:rPr lang="en-US" sz="1400" b="1" dirty="0">
+                <a:solidFill>
+                  <a:srgbClr val="3B305B"/>
+                </a:solidFill>
+                <a:latin typeface="BC Sans"/>
+                <a:ea typeface="Verdana" panose="020B0604030504040204" pitchFamily="34" charset="0"/>
+                <a:cs typeface="Verdana" panose="020B0604030504040204" pitchFamily="34" charset="0"/>
+              </a:rPr>
+              <a:t>   {{</a:t>
+            </a:r>
+            <a:r>
+              <a:rPr lang="en-US" sz="1400" b="1" dirty="0" err="1">
+                <a:solidFill>
+                  <a:srgbClr val="3B305B"/>
+                </a:solidFill>
+                <a:latin typeface="BC Sans"/>
+                <a:ea typeface="Verdana" panose="020B0604030504040204" pitchFamily="34" charset="0"/>
+                <a:cs typeface="Verdana" panose="020B0604030504040204" pitchFamily="34" charset="0"/>
+              </a:rPr>
+              <a:t>CertificateExpiryDate</a:t>
+            </a:r>
+            <a:r>
+              <a:rPr lang="en-US" sz="1400" b="1" dirty="0">
+                <a:solidFill>
+                  <a:srgbClr val="3B305B"/>
+                </a:solidFill>
+                <a:latin typeface="BC Sans"/>
+                <a:ea typeface="Verdana" panose="020B0604030504040204" pitchFamily="34" charset="0"/>
+                <a:cs typeface="Verdana" panose="020B0604030504040204" pitchFamily="34" charset="0"/>
+              </a:rPr>
+              <a:t>}} </a:t>
+            </a:r>
+          </a:p>
+          <a:p>
+            <a:r>
+              <a:rPr lang="en-US" sz="1400" b="1" dirty="0">
+                <a:solidFill>
+                  <a:srgbClr val="3B305B"/>
+                </a:solidFill>
+                <a:latin typeface="BC Sans"/>
+                <a:ea typeface="Verdana" panose="020B0604030504040204" pitchFamily="34" charset="0"/>
+                <a:cs typeface="Verdana" panose="020B0604030504040204" pitchFamily="34" charset="0"/>
+              </a:rPr>
+              <a:t>   {{</a:t>
+            </a:r>
+            <a:r>
+              <a:rPr lang="en-US" sz="1400" b="1" dirty="0" err="1">
+                <a:solidFill>
+                  <a:srgbClr val="3B305B"/>
+                </a:solidFill>
+                <a:latin typeface="BC Sans"/>
+                <a:ea typeface="Verdana" panose="020B0604030504040204" pitchFamily="34" charset="0"/>
+                <a:cs typeface="Verdana" panose="020B0604030504040204" pitchFamily="34" charset="0"/>
+              </a:rPr>
+              <a:t>CertificateId</a:t>
+            </a:r>
+            <a:r>
+              <a:rPr lang="en-US" sz="1400" b="1" dirty="0">
+                <a:solidFill>
+                  <a:srgbClr val="3B305B"/>
+                </a:solidFill>
+                <a:latin typeface="BC Sans"/>
+                <a:ea typeface="Verdana" panose="020B0604030504040204" pitchFamily="34" charset="0"/>
+                <a:cs typeface="Verdana" panose="020B0604030504040204" pitchFamily="34" charset="0"/>
+              </a:rPr>
+              <a:t>}}  </a:t>
+            </a:r>
+          </a:p>
+        </p:txBody>
+      </p:sp>
+      <p:sp>
+        <p:nvSpPr>
+          <p:cNvPr id="14" name="TextBox 13">
+            <a:extLst>
+              <a:ext uri="{FF2B5EF4-FFF2-40B4-BE49-F238E27FC236}">
+                <a16:creationId xmlns:a16="http://schemas.microsoft.com/office/drawing/2014/main" id="{57D8A3F2-1C6B-22B4-1BD9-38839FC9A349}"/>
+              </a:ext>
+            </a:extLst>
+          </p:cNvPr>
+          <p:cNvSpPr txBox="1"/>
+          <p:nvPr/>
+        </p:nvSpPr>
+        <p:spPr>
+          <a:xfrm>
+            <a:off x="3426793" y="6427723"/>
+            <a:ext cx="2228049" cy="523220"/>
+          </a:xfrm>
+          <a:prstGeom prst="rect">
+            <a:avLst/>
+          </a:prstGeom>
+          <a:noFill/>
+        </p:spPr>
+        <p:txBody>
+          <a:bodyPr wrap="square" rtlCol="0">
+            <a:spAutoFit/>
+          </a:bodyPr>
+          <a:lstStyle/>
+          <a:p>
+            <a:r>
+              <a:rPr lang="en-US" sz="1400" dirty="0">
+                <a:solidFill>
+                  <a:srgbClr val="3B305B"/>
+                </a:solidFill>
+                <a:latin typeface="BC Sans"/>
+                <a:ea typeface="Verdana" panose="020B0604030504040204" pitchFamily="34" charset="0"/>
+              </a:rPr>
+              <a:t>{{</a:t>
+            </a:r>
+            <a:r>
+              <a:rPr lang="en-US" sz="1400" dirty="0" err="1">
+                <a:solidFill>
+                  <a:srgbClr val="3B305B"/>
+                </a:solidFill>
+                <a:latin typeface="BC Sans"/>
+                <a:ea typeface="Verdana" panose="020B0604030504040204" pitchFamily="34" charset="0"/>
+              </a:rPr>
+              <a:t>IMG_Document_Image</a:t>
+            </a:r>
+            <a:r>
+              <a:rPr lang="en-US" sz="1400" dirty="0">
+                <a:solidFill>
+                  <a:srgbClr val="3B305B"/>
+                </a:solidFill>
+                <a:latin typeface="BC Sans"/>
+                <a:ea typeface="Verdana" panose="020B0604030504040204" pitchFamily="34" charset="0"/>
+              </a:rPr>
+              <a:t>}}</a:t>
+            </a:r>
+          </a:p>
+          <a:p>
+            <a:endParaRPr lang="en-US" sz="1400" b="0" dirty="0">
+              <a:solidFill>
+                <a:srgbClr val="000000"/>
+              </a:solidFill>
+              <a:effectLst/>
+              <a:latin typeface="Consolas" panose="020B0609020204030204" pitchFamily="49" charset="0"/>
+            </a:endParaRPr>
+          </a:p>
+        </p:txBody>
+      </p:sp>
+      <p:pic>
+        <p:nvPicPr>
+          <p:cNvPr id="16" name="Picture 15" descr="A black background with a black square&#10;&#10;Description automatically generated with medium confidence">
+            <a:extLst>
+              <a:ext uri="{FF2B5EF4-FFF2-40B4-BE49-F238E27FC236}">
+                <a16:creationId xmlns:a16="http://schemas.microsoft.com/office/drawing/2014/main" id="{E40069CD-B62C-1E37-725A-409E8A30370D}"/>
+              </a:ext>
+            </a:extLst>
+          </p:cNvPr>
+          <p:cNvPicPr>
+            <a:picLocks noChangeAspect="1"/>
+          </p:cNvPicPr>
+          <p:nvPr/>
+        </p:nvPicPr>
+        <p:blipFill>
+          <a:blip r:embed="rId4">
+            <a:duotone>
+              <a:schemeClr val="accent3">
+                <a:shade val="45000"/>
+                <a:satMod val="135000"/>
+              </a:schemeClr>
+              <a:prstClr val="white"/>
+            </a:duotone>
+          </a:blip>
+          <a:stretch>
+            <a:fillRect/>
+          </a:stretch>
+        </p:blipFill>
+        <p:spPr>
+          <a:xfrm>
+            <a:off x="2207164" y="1681641"/>
+            <a:ext cx="1181100" cy="1181100"/>
+          </a:xfrm>
+          <a:prstGeom prst="rect">
+            <a:avLst/>
+          </a:prstGeom>
+          <a:noFill/>
+          <a:ln>
+            <a:noFill/>
+          </a:ln>
+        </p:spPr>
+      </p:pic>
+      <p:sp>
+        <p:nvSpPr>
+          <p:cNvPr id="17" name="TextBox 8">
+            <a:extLst>
+              <a:ext uri="{FF2B5EF4-FFF2-40B4-BE49-F238E27FC236}">
+                <a16:creationId xmlns:a16="http://schemas.microsoft.com/office/drawing/2014/main" id="{2661C2CE-7AAD-2E59-A527-EDBEF23061BD}"/>
+              </a:ext>
+            </a:extLst>
+          </p:cNvPr>
+          <p:cNvSpPr txBox="1"/>
+          <p:nvPr/>
+        </p:nvSpPr>
+        <p:spPr>
+          <a:xfrm>
+            <a:off x="2144105" y="3722905"/>
+            <a:ext cx="10993954" cy="1212320"/>
           </a:xfrm>
           <a:prstGeom prst="rect">
             <a:avLst/>
@@ -4324,6 +4422,14 @@
             </a:lvl9pPr>
           </a:lstStyle>
           <a:p>
+            <a:pPr marL="1496060" marR="3183255">
+              <a:lnSpc>
+                <a:spcPct val="123000"/>
+              </a:lnSpc>
+              <a:spcBef>
+                <a:spcPts val="515"/>
+              </a:spcBef>
+            </a:pPr>
             <a:r>
               <a:rPr lang="en-US" sz="1400" dirty="0">
                 <a:solidFill>
@@ -4331,180 +4437,56 @@
                 </a:solidFill>
                 <a:latin typeface="BC Sans"/>
                 <a:ea typeface="Verdana" panose="020B0604030504040204" pitchFamily="34" charset="0"/>
-                <a:cs typeface="Verdana" panose="020B0604030504040204" pitchFamily="34" charset="0"/>
               </a:rPr>
-              <a:t>Effective Date:	</a:t>
-            </a:r>
-            <a:r>
-              <a:rPr lang="en-US" sz="1400" b="1" dirty="0">
+              <a:t>Assisted Living Service(s): {{</a:t>
+            </a:r>
+            <a:r>
+              <a:rPr lang="en-US" sz="1400" b="0" dirty="0">
+                <a:solidFill>
+                  <a:srgbClr val="C00000"/>
+                </a:solidFill>
+                <a:effectLst/>
+                <a:latin typeface="Consolas" panose="020B0609020204030204" pitchFamily="49" charset="0"/>
+              </a:rPr>
+              <a:t>Services</a:t>
+            </a:r>
+            <a:r>
+              <a:rPr lang="en-US" sz="1400" dirty="0">
                 <a:solidFill>
                   <a:srgbClr val="3B305B"/>
                 </a:solidFill>
                 <a:latin typeface="BC Sans"/>
                 <a:ea typeface="Verdana" panose="020B0604030504040204" pitchFamily="34" charset="0"/>
-                <a:cs typeface="Verdana" panose="020B0604030504040204" pitchFamily="34" charset="0"/>
               </a:rPr>
-              <a:t> 	</a:t>
-            </a:r>
-          </a:p>
-          <a:p>
-            <a:r>
-              <a:rPr lang="en-US" sz="1400" dirty="0">
-                <a:solidFill>
-                  <a:srgbClr val="3B305B"/>
-                </a:solidFill>
-                <a:latin typeface="BC Sans"/>
-                <a:ea typeface="Verdana" panose="020B0604030504040204" pitchFamily="34" charset="0"/>
-                <a:cs typeface="Verdana" panose="020B0604030504040204" pitchFamily="34" charset="0"/>
-              </a:rPr>
-              <a:t>Expiry Date:	</a:t>
-            </a:r>
-          </a:p>
-          <a:p>
-            <a:r>
-              <a:rPr lang="en-US" sz="1400" dirty="0">
-                <a:solidFill>
-                  <a:srgbClr val="3B305B"/>
-                </a:solidFill>
-                <a:latin typeface="BC Sans"/>
-                <a:ea typeface="Verdana" panose="020B0604030504040204" pitchFamily="34" charset="0"/>
-                <a:cs typeface="Verdana" panose="020B0604030504040204" pitchFamily="34" charset="0"/>
-              </a:rPr>
-              <a:t>Registration #:</a:t>
-            </a:r>
-            <a:endParaRPr lang="en-US" sz="1400" b="1" dirty="0">
+              <a:t>}}</a:t>
+            </a:r>
+          </a:p>
+          <a:p>
+            <a:pPr marL="1496060" marR="3183255">
+              <a:lnSpc>
+                <a:spcPct val="123000"/>
+              </a:lnSpc>
+              <a:spcBef>
+                <a:spcPts val="515"/>
+              </a:spcBef>
+            </a:pPr>
+            <a:endParaRPr lang="en-US" sz="800" dirty="0">
               <a:solidFill>
                 <a:srgbClr val="3B305B"/>
               </a:solidFill>
               <a:latin typeface="BC Sans"/>
               <a:ea typeface="Verdana" panose="020B0604030504040204" pitchFamily="34" charset="0"/>
-              <a:cs typeface="Verdana" panose="020B0604030504040204" pitchFamily="34" charset="0"/>
             </a:endParaRPr>
           </a:p>
-        </p:txBody>
-      </p:sp>
-      <p:sp>
-        <p:nvSpPr>
-          <p:cNvPr id="8" name="TextBox 10">
-            <a:extLst>
-              <a:ext uri="{FF2B5EF4-FFF2-40B4-BE49-F238E27FC236}">
-                <a16:creationId xmlns:a16="http://schemas.microsoft.com/office/drawing/2014/main" id="{8A9FF3DB-1D54-9425-AF80-A446AE7C3436}"/>
-              </a:ext>
-            </a:extLst>
-          </p:cNvPr>
-          <p:cNvSpPr txBox="1"/>
-          <p:nvPr/>
-        </p:nvSpPr>
-        <p:spPr>
-          <a:xfrm>
-            <a:off x="7844589" y="6467111"/>
-            <a:ext cx="2640836" cy="738664"/>
-          </a:xfrm>
-          <a:prstGeom prst="rect">
-            <a:avLst/>
-          </a:prstGeom>
-          <a:noFill/>
-        </p:spPr>
-        <p:txBody>
-          <a:bodyPr wrap="square">
-            <a:spAutoFit/>
-          </a:bodyPr>
-          <a:lstStyle>
-            <a:defPPr>
-              <a:defRPr lang="en-US"/>
-            </a:defPPr>
-            <a:lvl1pPr marL="0" algn="l" defTabSz="457200" rtl="0" eaLnBrk="1" latinLnBrk="0" hangingPunct="1">
-              <a:defRPr sz="1800" kern="1200">
-                <a:solidFill>
-                  <a:schemeClr val="tx1"/>
-                </a:solidFill>
-                <a:latin typeface="+mn-lt"/>
-                <a:ea typeface="+mn-ea"/>
-                <a:cs typeface="+mn-cs"/>
-              </a:defRPr>
-            </a:lvl1pPr>
-            <a:lvl2pPr marL="457200" algn="l" defTabSz="457200" rtl="0" eaLnBrk="1" latinLnBrk="0" hangingPunct="1">
-              <a:defRPr sz="1800" kern="1200">
-                <a:solidFill>
-                  <a:schemeClr val="tx1"/>
-                </a:solidFill>
-                <a:latin typeface="+mn-lt"/>
-                <a:ea typeface="+mn-ea"/>
-                <a:cs typeface="+mn-cs"/>
-              </a:defRPr>
-            </a:lvl2pPr>
-            <a:lvl3pPr marL="914400" algn="l" defTabSz="457200" rtl="0" eaLnBrk="1" latinLnBrk="0" hangingPunct="1">
-              <a:defRPr sz="1800" kern="1200">
-                <a:solidFill>
-                  <a:schemeClr val="tx1"/>
-                </a:solidFill>
-                <a:latin typeface="+mn-lt"/>
-                <a:ea typeface="+mn-ea"/>
-                <a:cs typeface="+mn-cs"/>
-              </a:defRPr>
-            </a:lvl3pPr>
-            <a:lvl4pPr marL="1371600" algn="l" defTabSz="457200" rtl="0" eaLnBrk="1" latinLnBrk="0" hangingPunct="1">
-              <a:defRPr sz="1800" kern="1200">
-                <a:solidFill>
-                  <a:schemeClr val="tx1"/>
-                </a:solidFill>
-                <a:latin typeface="+mn-lt"/>
-                <a:ea typeface="+mn-ea"/>
-                <a:cs typeface="+mn-cs"/>
-              </a:defRPr>
-            </a:lvl4pPr>
-            <a:lvl5pPr marL="1828800" algn="l" defTabSz="457200" rtl="0" eaLnBrk="1" latinLnBrk="0" hangingPunct="1">
-              <a:defRPr sz="1800" kern="1200">
-                <a:solidFill>
-                  <a:schemeClr val="tx1"/>
-                </a:solidFill>
-                <a:latin typeface="+mn-lt"/>
-                <a:ea typeface="+mn-ea"/>
-                <a:cs typeface="+mn-cs"/>
-              </a:defRPr>
-            </a:lvl5pPr>
-            <a:lvl6pPr marL="2286000" algn="l" defTabSz="457200" rtl="0" eaLnBrk="1" latinLnBrk="0" hangingPunct="1">
-              <a:defRPr sz="1800" kern="1200">
-                <a:solidFill>
-                  <a:schemeClr val="tx1"/>
-                </a:solidFill>
-                <a:latin typeface="+mn-lt"/>
-                <a:ea typeface="+mn-ea"/>
-                <a:cs typeface="+mn-cs"/>
-              </a:defRPr>
-            </a:lvl6pPr>
-            <a:lvl7pPr marL="2743200" algn="l" defTabSz="457200" rtl="0" eaLnBrk="1" latinLnBrk="0" hangingPunct="1">
-              <a:defRPr sz="1800" kern="1200">
-                <a:solidFill>
-                  <a:schemeClr val="tx1"/>
-                </a:solidFill>
-                <a:latin typeface="+mn-lt"/>
-                <a:ea typeface="+mn-ea"/>
-                <a:cs typeface="+mn-cs"/>
-              </a:defRPr>
-            </a:lvl7pPr>
-            <a:lvl8pPr marL="3200400" algn="l" defTabSz="457200" rtl="0" eaLnBrk="1" latinLnBrk="0" hangingPunct="1">
-              <a:defRPr sz="1800" kern="1200">
-                <a:solidFill>
-                  <a:schemeClr val="tx1"/>
-                </a:solidFill>
-                <a:latin typeface="+mn-lt"/>
-                <a:ea typeface="+mn-ea"/>
-                <a:cs typeface="+mn-cs"/>
-              </a:defRPr>
-            </a:lvl8pPr>
-            <a:lvl9pPr marL="3657600" algn="l" defTabSz="457200" rtl="0" eaLnBrk="1" latinLnBrk="0" hangingPunct="1">
-              <a:defRPr sz="1800" kern="1200">
-                <a:solidFill>
-                  <a:schemeClr val="tx1"/>
-                </a:solidFill>
-                <a:latin typeface="+mn-lt"/>
-                <a:ea typeface="+mn-ea"/>
-                <a:cs typeface="+mn-cs"/>
-              </a:defRPr>
-            </a:lvl9pPr>
-          </a:lstStyle>
-          <a:p>
+          <a:p>
+            <a:pPr marL="1496060" marR="3183255">
+              <a:lnSpc>
+                <a:spcPct val="123000"/>
+              </a:lnSpc>
+              <a:spcBef>
+                <a:spcPts val="515"/>
+              </a:spcBef>
+            </a:pPr>
             <a:r>
               <a:rPr lang="en-US" sz="1400" b="1" dirty="0">
                 <a:solidFill>
@@ -4512,133 +4494,19 @@
                 </a:solidFill>
                 <a:latin typeface="BC Sans"/>
                 <a:ea typeface="Verdana" panose="020B0604030504040204" pitchFamily="34" charset="0"/>
-                <a:cs typeface="Verdana" panose="020B0604030504040204" pitchFamily="34" charset="0"/>
               </a:rPr>
-              <a:t>   {{</a:t>
-            </a:r>
-            <a:r>
-              <a:rPr lang="en-US" sz="1400" b="1" dirty="0" err="1">
-                <a:solidFill>
-                  <a:srgbClr val="3B305B"/>
-                </a:solidFill>
-                <a:latin typeface="BC Sans"/>
-                <a:ea typeface="Verdana" panose="020B0604030504040204" pitchFamily="34" charset="0"/>
-                <a:cs typeface="Verdana" panose="020B0604030504040204" pitchFamily="34" charset="0"/>
-              </a:rPr>
-              <a:t>CertificateEffectiveDate</a:t>
-            </a:r>
-            <a:r>
-              <a:rPr lang="en-US" sz="1400" b="1" dirty="0">
-                <a:solidFill>
-                  <a:srgbClr val="3B305B"/>
-                </a:solidFill>
-                <a:latin typeface="BC Sans"/>
-                <a:ea typeface="Verdana" panose="020B0604030504040204" pitchFamily="34" charset="0"/>
-                <a:cs typeface="Verdana" panose="020B0604030504040204" pitchFamily="34" charset="0"/>
-              </a:rPr>
-              <a:t>}}</a:t>
-            </a:r>
-          </a:p>
-          <a:p>
-            <a:r>
-              <a:rPr lang="en-US" sz="1400" b="1" dirty="0">
-                <a:solidFill>
-                  <a:srgbClr val="3B305B"/>
-                </a:solidFill>
-                <a:latin typeface="BC Sans"/>
-                <a:ea typeface="Verdana" panose="020B0604030504040204" pitchFamily="34" charset="0"/>
-                <a:cs typeface="Verdana" panose="020B0604030504040204" pitchFamily="34" charset="0"/>
-              </a:rPr>
-              <a:t>   {{</a:t>
-            </a:r>
-            <a:r>
-              <a:rPr lang="en-US" sz="1400" b="1" dirty="0" err="1">
-                <a:solidFill>
-                  <a:srgbClr val="3B305B"/>
-                </a:solidFill>
-                <a:latin typeface="BC Sans"/>
-                <a:ea typeface="Verdana" panose="020B0604030504040204" pitchFamily="34" charset="0"/>
-                <a:cs typeface="Verdana" panose="020B0604030504040204" pitchFamily="34" charset="0"/>
-              </a:rPr>
-              <a:t>CertificateExpiryDate</a:t>
-            </a:r>
-            <a:r>
-              <a:rPr lang="en-US" sz="1400" b="1" dirty="0">
-                <a:solidFill>
-                  <a:srgbClr val="3B305B"/>
-                </a:solidFill>
-                <a:latin typeface="BC Sans"/>
-                <a:ea typeface="Verdana" panose="020B0604030504040204" pitchFamily="34" charset="0"/>
-                <a:cs typeface="Verdana" panose="020B0604030504040204" pitchFamily="34" charset="0"/>
-              </a:rPr>
-              <a:t>}} </a:t>
-            </a:r>
-          </a:p>
-          <a:p>
-            <a:r>
-              <a:rPr lang="en-US" sz="1400" b="1" dirty="0">
-                <a:solidFill>
-                  <a:srgbClr val="3B305B"/>
-                </a:solidFill>
-                <a:latin typeface="BC Sans"/>
-                <a:ea typeface="Verdana" panose="020B0604030504040204" pitchFamily="34" charset="0"/>
-                <a:cs typeface="Verdana" panose="020B0604030504040204" pitchFamily="34" charset="0"/>
-              </a:rPr>
-              <a:t>   {{</a:t>
-            </a:r>
-            <a:r>
-              <a:rPr lang="en-US" sz="1400" b="1" dirty="0" err="1">
-                <a:solidFill>
-                  <a:srgbClr val="3B305B"/>
-                </a:solidFill>
-                <a:latin typeface="BC Sans"/>
-                <a:ea typeface="Verdana" panose="020B0604030504040204" pitchFamily="34" charset="0"/>
-                <a:cs typeface="Verdana" panose="020B0604030504040204" pitchFamily="34" charset="0"/>
-              </a:rPr>
-              <a:t>CertificateId</a:t>
-            </a:r>
-            <a:r>
-              <a:rPr lang="en-US" sz="1400" b="1" dirty="0">
-                <a:solidFill>
-                  <a:srgbClr val="3B305B"/>
-                </a:solidFill>
-                <a:latin typeface="BC Sans"/>
-                <a:ea typeface="Verdana" panose="020B0604030504040204" pitchFamily="34" charset="0"/>
-                <a:cs typeface="Verdana" panose="020B0604030504040204" pitchFamily="34" charset="0"/>
-              </a:rPr>
-              <a:t>}}  </a:t>
-            </a:r>
-          </a:p>
-        </p:txBody>
-      </p:sp>
-      <p:sp>
-        <p:nvSpPr>
-          <p:cNvPr id="15" name="TextBox 14">
-            <a:extLst>
-              <a:ext uri="{FF2B5EF4-FFF2-40B4-BE49-F238E27FC236}">
-                <a16:creationId xmlns:a16="http://schemas.microsoft.com/office/drawing/2014/main" id="{DE0B0ACC-F879-5813-6C19-06FDE5D6375B}"/>
-              </a:ext>
-            </a:extLst>
-          </p:cNvPr>
-          <p:cNvSpPr txBox="1"/>
-          <p:nvPr/>
-        </p:nvSpPr>
-        <p:spPr>
-          <a:xfrm>
-            <a:off x="3354022" y="6426347"/>
-            <a:ext cx="2228049" cy="523220"/>
-          </a:xfrm>
-          <a:prstGeom prst="rect">
-            <a:avLst/>
-          </a:prstGeom>
-          <a:noFill/>
-        </p:spPr>
-        <p:txBody>
-          <a:bodyPr wrap="square" rtlCol="0">
-            <a:spAutoFit/>
-          </a:bodyPr>
-          <a:lstStyle/>
-          <a:p>
+              <a:t>CONDITIONS:</a:t>
+            </a:r>
+          </a:p>
+          <a:p>
+            <a:pPr marL="1496060" marR="3183255">
+              <a:lnSpc>
+                <a:spcPct val="123000"/>
+              </a:lnSpc>
+              <a:spcBef>
+                <a:spcPts val="515"/>
+              </a:spcBef>
+            </a:pPr>
             <a:r>
               <a:rPr lang="en-US" sz="1400" dirty="0">
                 <a:solidFill>
@@ -4657,7 +4525,7 @@
                 <a:latin typeface="BC Sans"/>
                 <a:ea typeface="Verdana" panose="020B0604030504040204" pitchFamily="34" charset="0"/>
               </a:rPr>
-              <a:t>IMG_Document_Image</a:t>
+              <a:t>ConditionAndDescription</a:t>
             </a:r>
             <a:r>
               <a:rPr lang="en-US" sz="1400" dirty="0">
@@ -4667,16 +4535,13 @@
                 <a:latin typeface="BC Sans"/>
                 <a:ea typeface="Verdana" panose="020B0604030504040204" pitchFamily="34" charset="0"/>
               </a:rPr>
-              <a:t>}}</a:t>
-            </a:r>
-          </a:p>
-          <a:p>
-            <a:endParaRPr lang="en-US" sz="1400" b="0" dirty="0">
-              <a:solidFill>
-                <a:srgbClr val="000000"/>
-              </a:solidFill>
+              <a:t>}} {{ConditionAndDescription1}}</a:t>
+            </a:r>
+            <a:endParaRPr lang="en-CA" sz="800" dirty="0">
               <a:effectLst/>
-              <a:latin typeface="Consolas" panose="020B0609020204030204" pitchFamily="49" charset="0"/>
+              <a:latin typeface="BC Sans"/>
+              <a:ea typeface="Verdana" panose="020B0604030504040204" pitchFamily="34" charset="0"/>
+              <a:cs typeface="Verdana" panose="020B0604030504040204" pitchFamily="34" charset="0"/>
             </a:endParaRPr>
           </a:p>
         </p:txBody>
@@ -4957,6 +4822,7 @@
 
 <file path=docMetadata/LabelInfo.xml><?xml version="1.0" encoding="utf-8"?>
 <clbl:labelList xmlns:clbl="http://schemas.microsoft.com/office/2020/mipLabelMetadata">
+  <clbl:label id="{d9290083-bd2f-48a2-8ac5-09a524b17d15}" enabled="1" method="Privileged" siteId="{b9fec68c-c92d-461e-9a97-3d03a0f18b82}" contentBits="1" removed="0"/>
   <clbl:label id="{e0793d39-0939-496d-b129-198edd916feb}" enabled="0" method="" siteId="{e0793d39-0939-496d-b129-198edd916feb}" removed="1"/>
 </clbl:labelList>
 </file>
--- a/ALR-DocgenTemplates/CertificateBackground_SU.pptx
+++ b/ALR-DocgenTemplates/CertificateBackground_SU.pptx
@@ -272,7 +272,7 @@
           <a:p>
             <a:fld id="{E0C45857-5204-4055-BBBB-5D81F6C0DEE1}" type="datetimeFigureOut">
               <a:rPr lang="en-US" smtClean="0"/>
-              <a:t>9/2/2025</a:t>
+              <a:t>4/30/2026</a:t>
             </a:fld>
             <a:endParaRPr lang="en-US"/>
           </a:p>
@@ -442,7 +442,7 @@
           <a:p>
             <a:fld id="{E0C45857-5204-4055-BBBB-5D81F6C0DEE1}" type="datetimeFigureOut">
               <a:rPr lang="en-US" smtClean="0"/>
-              <a:t>9/2/2025</a:t>
+              <a:t>4/30/2026</a:t>
             </a:fld>
             <a:endParaRPr lang="en-US"/>
           </a:p>
@@ -622,7 +622,7 @@
           <a:p>
             <a:fld id="{E0C45857-5204-4055-BBBB-5D81F6C0DEE1}" type="datetimeFigureOut">
               <a:rPr lang="en-US" smtClean="0"/>
-              <a:t>9/2/2025</a:t>
+              <a:t>4/30/2026</a:t>
             </a:fld>
             <a:endParaRPr lang="en-US"/>
           </a:p>
@@ -792,7 +792,7 @@
           <a:p>
             <a:fld id="{E0C45857-5204-4055-BBBB-5D81F6C0DEE1}" type="datetimeFigureOut">
               <a:rPr lang="en-US" smtClean="0"/>
-              <a:t>9/2/2025</a:t>
+              <a:t>4/30/2026</a:t>
             </a:fld>
             <a:endParaRPr lang="en-US"/>
           </a:p>
@@ -1036,7 +1036,7 @@
           <a:p>
             <a:fld id="{E0C45857-5204-4055-BBBB-5D81F6C0DEE1}" type="datetimeFigureOut">
               <a:rPr lang="en-US" smtClean="0"/>
-              <a:t>9/2/2025</a:t>
+              <a:t>4/30/2026</a:t>
             </a:fld>
             <a:endParaRPr lang="en-US"/>
           </a:p>
@@ -1268,7 +1268,7 @@
           <a:p>
             <a:fld id="{E0C45857-5204-4055-BBBB-5D81F6C0DEE1}" type="datetimeFigureOut">
               <a:rPr lang="en-US" smtClean="0"/>
-              <a:t>9/2/2025</a:t>
+              <a:t>4/30/2026</a:t>
             </a:fld>
             <a:endParaRPr lang="en-US"/>
           </a:p>
@@ -1635,7 +1635,7 @@
           <a:p>
             <a:fld id="{E0C45857-5204-4055-BBBB-5D81F6C0DEE1}" type="datetimeFigureOut">
               <a:rPr lang="en-US" smtClean="0"/>
-              <a:t>9/2/2025</a:t>
+              <a:t>4/30/2026</a:t>
             </a:fld>
             <a:endParaRPr lang="en-US"/>
           </a:p>
@@ -1753,7 +1753,7 @@
           <a:p>
             <a:fld id="{E0C45857-5204-4055-BBBB-5D81F6C0DEE1}" type="datetimeFigureOut">
               <a:rPr lang="en-US" smtClean="0"/>
-              <a:t>9/2/2025</a:t>
+              <a:t>4/30/2026</a:t>
             </a:fld>
             <a:endParaRPr lang="en-US"/>
           </a:p>
@@ -1848,7 +1848,7 @@
           <a:p>
             <a:fld id="{E0C45857-5204-4055-BBBB-5D81F6C0DEE1}" type="datetimeFigureOut">
               <a:rPr lang="en-US" smtClean="0"/>
-              <a:t>9/2/2025</a:t>
+              <a:t>4/30/2026</a:t>
             </a:fld>
             <a:endParaRPr lang="en-US"/>
           </a:p>
@@ -2125,7 +2125,7 @@
           <a:p>
             <a:fld id="{E0C45857-5204-4055-BBBB-5D81F6C0DEE1}" type="datetimeFigureOut">
               <a:rPr lang="en-US" smtClean="0"/>
-              <a:t>9/2/2025</a:t>
+              <a:t>4/30/2026</a:t>
             </a:fld>
             <a:endParaRPr lang="en-US"/>
           </a:p>
@@ -2382,7 +2382,7 @@
           <a:p>
             <a:fld id="{E0C45857-5204-4055-BBBB-5D81F6C0DEE1}" type="datetimeFigureOut">
               <a:rPr lang="en-US" smtClean="0"/>
-              <a:t>9/2/2025</a:t>
+              <a:t>4/30/2026</a:t>
             </a:fld>
             <a:endParaRPr lang="en-US"/>
           </a:p>
@@ -2595,7 +2595,7 @@
           <a:p>
             <a:fld id="{E0C45857-5204-4055-BBBB-5D81F6C0DEE1}" type="datetimeFigureOut">
               <a:rPr lang="en-US" smtClean="0"/>
-              <a:t>9/2/2025</a:t>
+              <a:t>4/30/2026</a:t>
             </a:fld>
             <a:endParaRPr lang="en-US"/>
           </a:p>
@@ -3510,7 +3510,7 @@
         <p:spPr>
           <a:xfrm>
             <a:off x="2154614" y="1695910"/>
-            <a:ext cx="7999664" cy="1865382"/>
+            <a:ext cx="7999664" cy="307777"/>
           </a:xfrm>
           <a:prstGeom prst="rect">
             <a:avLst/>
@@ -3528,101 +3528,7 @@
                 <a:spcPts val="5"/>
               </a:spcBef>
             </a:pPr>
-            <a:r>
-              <a:rPr lang="en-US" sz="2400" b="1" dirty="0">
-                <a:solidFill>
-                  <a:srgbClr val="3B305B"/>
-                </a:solidFill>
-                <a:effectLst/>
-                <a:latin typeface="BC Sans"/>
-                <a:ea typeface="Verdana" panose="020B0604030504040204" pitchFamily="34" charset="0"/>
-                <a:cs typeface="Verdana" panose="020B0604030504040204" pitchFamily="34" charset="0"/>
-              </a:rPr>
-              <a:t>{{</a:t>
-            </a:r>
-            <a:r>
-              <a:rPr lang="en-US" sz="2200" b="1" dirty="0" err="1">
-                <a:solidFill>
-                  <a:srgbClr val="3B305B"/>
-                </a:solidFill>
-                <a:effectLst/>
-                <a:latin typeface="BC Sans"/>
-                <a:ea typeface="Verdana" panose="020B0604030504040204" pitchFamily="34" charset="0"/>
-                <a:cs typeface="Verdana" panose="020B0604030504040204" pitchFamily="34" charset="0"/>
-              </a:rPr>
-              <a:t>ResidenceName</a:t>
-            </a:r>
-            <a:r>
-              <a:rPr lang="en-US" sz="2400" b="1" dirty="0">
-                <a:solidFill>
-                  <a:srgbClr val="3B305B"/>
-                </a:solidFill>
-                <a:effectLst/>
-                <a:latin typeface="BC Sans"/>
-                <a:ea typeface="Verdana" panose="020B0604030504040204" pitchFamily="34" charset="0"/>
-                <a:cs typeface="Verdana" panose="020B0604030504040204" pitchFamily="34" charset="0"/>
-              </a:rPr>
-              <a:t>}}</a:t>
-            </a:r>
-          </a:p>
-          <a:p>
-            <a:pPr marL="1497330">
-              <a:spcBef>
-                <a:spcPts val="685"/>
-              </a:spcBef>
-            </a:pPr>
-            <a:r>
-              <a:rPr kumimoji="0" lang="en-US" sz="2000" b="1" i="0" u="none" strike="noStrike" kern="1200" cap="none" spc="0" normalizeH="0" baseline="0" noProof="0" dirty="0">
-                <a:ln>
-                  <a:noFill/>
-                </a:ln>
-                <a:solidFill>
-                  <a:srgbClr val="3B305B"/>
-                </a:solidFill>
-                <a:effectLst/>
-                <a:uLnTx/>
-                <a:uFillTx/>
-                <a:latin typeface="BC Sans"/>
-                <a:ea typeface="Verdana" panose="020B0604030504040204" pitchFamily="34" charset="0"/>
-                <a:cs typeface="Verdana" panose="020B0604030504040204" pitchFamily="34" charset="0"/>
-              </a:rPr>
-              <a:t>{{</a:t>
-            </a:r>
-            <a:r>
-              <a:rPr kumimoji="0" lang="en-US" sz="2000" b="1" i="0" u="none" strike="noStrike" kern="1200" cap="none" spc="0" normalizeH="0" baseline="0" noProof="0" dirty="0" err="1">
-                <a:ln>
-                  <a:noFill/>
-                </a:ln>
-                <a:solidFill>
-                  <a:srgbClr val="3B305B"/>
-                </a:solidFill>
-                <a:effectLst/>
-                <a:uLnTx/>
-                <a:uFillTx/>
-                <a:latin typeface="BC Sans"/>
-                <a:ea typeface="Verdana" panose="020B0604030504040204" pitchFamily="34" charset="0"/>
-                <a:cs typeface="Verdana" panose="020B0604030504040204" pitchFamily="34" charset="0"/>
-              </a:rPr>
-              <a:t>RegistrantName</a:t>
-            </a:r>
-            <a:r>
-              <a:rPr kumimoji="0" lang="en-US" sz="2000" b="1" i="0" u="none" strike="noStrike" kern="1200" cap="none" spc="0" normalizeH="0" baseline="0" noProof="0" dirty="0">
-                <a:ln>
-                  <a:noFill/>
-                </a:ln>
-                <a:solidFill>
-                  <a:srgbClr val="3B305B"/>
-                </a:solidFill>
-                <a:effectLst/>
-                <a:uLnTx/>
-                <a:uFillTx/>
-                <a:latin typeface="BC Sans"/>
-                <a:ea typeface="Verdana" panose="020B0604030504040204" pitchFamily="34" charset="0"/>
-                <a:cs typeface="Verdana" panose="020B0604030504040204" pitchFamily="34" charset="0"/>
-              </a:rPr>
-              <a:t>}}</a:t>
-            </a:r>
-            <a:endParaRPr lang="en-US" sz="2000" dirty="0">
+            <a:endParaRPr lang="en-US" sz="1400" dirty="0">
               <a:solidFill>
                 <a:srgbClr val="3B305B"/>
               </a:solidFill>
@@ -3631,203 +3537,6 @@
               <a:ea typeface="Verdana" panose="020B0604030504040204" pitchFamily="34" charset="0"/>
               <a:cs typeface="Verdana" panose="020B0604030504040204" pitchFamily="34" charset="0"/>
             </a:endParaRPr>
-          </a:p>
-          <a:p>
-            <a:pPr marL="1497330">
-              <a:spcBef>
-                <a:spcPts val="685"/>
-              </a:spcBef>
-              <a:spcAft>
-                <a:spcPts val="0"/>
-              </a:spcAft>
-            </a:pPr>
-            <a:r>
-              <a:rPr lang="en-US" sz="1600" dirty="0">
-                <a:solidFill>
-                  <a:srgbClr val="3B305B"/>
-                </a:solidFill>
-                <a:effectLst/>
-                <a:latin typeface="BC Sans"/>
-                <a:ea typeface="Verdana" panose="020B0604030504040204" pitchFamily="34" charset="0"/>
-                <a:cs typeface="Verdana" panose="020B0604030504040204" pitchFamily="34" charset="0"/>
-              </a:rPr>
-              <a:t>{{</a:t>
-            </a:r>
-            <a:r>
-              <a:rPr lang="en-US" sz="1600" dirty="0" err="1">
-                <a:solidFill>
-                  <a:srgbClr val="3B305B"/>
-                </a:solidFill>
-                <a:effectLst/>
-                <a:latin typeface="BC Sans"/>
-                <a:ea typeface="Verdana" panose="020B0604030504040204" pitchFamily="34" charset="0"/>
-                <a:cs typeface="Verdana" panose="020B0604030504040204" pitchFamily="34" charset="0"/>
-              </a:rPr>
-              <a:t>ResidenceAddress</a:t>
-            </a:r>
-            <a:r>
-              <a:rPr lang="en-US" sz="1600" dirty="0">
-                <a:solidFill>
-                  <a:srgbClr val="3B305B"/>
-                </a:solidFill>
-                <a:effectLst/>
-                <a:latin typeface="BC Sans"/>
-                <a:ea typeface="Verdana" panose="020B0604030504040204" pitchFamily="34" charset="0"/>
-                <a:cs typeface="Verdana" panose="020B0604030504040204" pitchFamily="34" charset="0"/>
-              </a:rPr>
-              <a:t>}}</a:t>
-            </a:r>
-          </a:p>
-          <a:p>
-            <a:pPr marL="1496060" marR="3183255">
-              <a:lnSpc>
-                <a:spcPct val="123000"/>
-              </a:lnSpc>
-              <a:spcBef>
-                <a:spcPts val="515"/>
-              </a:spcBef>
-              <a:spcAft>
-                <a:spcPts val="0"/>
-              </a:spcAft>
-            </a:pPr>
-            <a:r>
-              <a:rPr lang="en-US" sz="1400" dirty="0">
-                <a:solidFill>
-                  <a:srgbClr val="C00000"/>
-                </a:solidFill>
-                <a:effectLst/>
-                <a:latin typeface="BC Sans"/>
-                <a:ea typeface="Verdana" panose="020B0604030504040204" pitchFamily="34" charset="0"/>
-                <a:cs typeface="Verdana" panose="020B0604030504040204" pitchFamily="34" charset="0"/>
-              </a:rPr>
-              <a:t>Class: {{</a:t>
-            </a:r>
-            <a:r>
-              <a:rPr lang="en-US" sz="1400" dirty="0" err="1">
-                <a:solidFill>
-                  <a:srgbClr val="C00000"/>
-                </a:solidFill>
-                <a:effectLst/>
-                <a:latin typeface="BC Sans"/>
-                <a:ea typeface="Verdana" panose="020B0604030504040204" pitchFamily="34" charset="0"/>
-                <a:cs typeface="Verdana" panose="020B0604030504040204" pitchFamily="34" charset="0"/>
-              </a:rPr>
-              <a:t>ResidenceClassType</a:t>
-            </a:r>
-            <a:r>
-              <a:rPr lang="en-US" sz="1400" dirty="0">
-                <a:solidFill>
-                  <a:srgbClr val="C00000"/>
-                </a:solidFill>
-                <a:latin typeface="BC Sans"/>
-                <a:ea typeface="Verdana" panose="020B0604030504040204" pitchFamily="34" charset="0"/>
-                <a:cs typeface="Verdana" panose="020B0604030504040204" pitchFamily="34" charset="0"/>
-              </a:rPr>
-              <a:t>}}</a:t>
-            </a:r>
-            <a:endParaRPr lang="en-US" sz="1400" dirty="0">
-              <a:solidFill>
-                <a:srgbClr val="C00000"/>
-              </a:solidFill>
-              <a:effectLst/>
-              <a:latin typeface="BC Sans"/>
-              <a:ea typeface="Verdana" panose="020B0604030504040204" pitchFamily="34" charset="0"/>
-              <a:cs typeface="Verdana" panose="020B0604030504040204" pitchFamily="34" charset="0"/>
-            </a:endParaRPr>
-          </a:p>
-          <a:p>
-            <a:pPr marL="1496060" marR="3183255">
-              <a:lnSpc>
-                <a:spcPct val="123000"/>
-              </a:lnSpc>
-              <a:spcBef>
-                <a:spcPts val="515"/>
-              </a:spcBef>
-            </a:pPr>
-            <a:r>
-              <a:rPr lang="en-US" sz="1400" dirty="0">
-                <a:solidFill>
-                  <a:srgbClr val="3B305B"/>
-                </a:solidFill>
-                <a:effectLst/>
-                <a:latin typeface="BC Sans"/>
-                <a:ea typeface="Verdana" panose="020B0604030504040204" pitchFamily="34" charset="0"/>
-                <a:cs typeface="Verdana" panose="020B0604030504040204" pitchFamily="34" charset="0"/>
-              </a:rPr>
-              <a:t>Number</a:t>
-            </a:r>
-            <a:r>
-              <a:rPr lang="en-US" sz="1400" spc="200" dirty="0">
-                <a:solidFill>
-                  <a:srgbClr val="3B305B"/>
-                </a:solidFill>
-                <a:effectLst/>
-                <a:latin typeface="BC Sans"/>
-                <a:ea typeface="Verdana" panose="020B0604030504040204" pitchFamily="34" charset="0"/>
-                <a:cs typeface="Verdana" panose="020B0604030504040204" pitchFamily="34" charset="0"/>
-              </a:rPr>
-              <a:t> </a:t>
-            </a:r>
-            <a:r>
-              <a:rPr lang="en-US" sz="1400" dirty="0">
-                <a:solidFill>
-                  <a:srgbClr val="3B305B"/>
-                </a:solidFill>
-                <a:effectLst/>
-                <a:latin typeface="BC Sans"/>
-                <a:ea typeface="Verdana" panose="020B0604030504040204" pitchFamily="34" charset="0"/>
-                <a:cs typeface="Verdana" panose="020B0604030504040204" pitchFamily="34" charset="0"/>
-              </a:rPr>
-              <a:t>of</a:t>
-            </a:r>
-            <a:r>
-              <a:rPr lang="en-US" sz="1400" spc="200" dirty="0">
-                <a:solidFill>
-                  <a:srgbClr val="3B305B"/>
-                </a:solidFill>
-                <a:effectLst/>
-                <a:latin typeface="BC Sans"/>
-                <a:ea typeface="Verdana" panose="020B0604030504040204" pitchFamily="34" charset="0"/>
-                <a:cs typeface="Verdana" panose="020B0604030504040204" pitchFamily="34" charset="0"/>
-              </a:rPr>
-              <a:t> </a:t>
-            </a:r>
-            <a:r>
-              <a:rPr lang="en-US" sz="1400" dirty="0">
-                <a:solidFill>
-                  <a:srgbClr val="3B305B"/>
-                </a:solidFill>
-                <a:effectLst/>
-                <a:latin typeface="BC Sans"/>
-                <a:ea typeface="Verdana" panose="020B0604030504040204" pitchFamily="34" charset="0"/>
-                <a:cs typeface="Verdana" panose="020B0604030504040204" pitchFamily="34" charset="0"/>
-              </a:rPr>
-              <a:t>units: {{</a:t>
-            </a:r>
-            <a:r>
-              <a:rPr lang="en-US" sz="1400" dirty="0" err="1">
-                <a:solidFill>
-                  <a:srgbClr val="3B305B"/>
-                </a:solidFill>
-                <a:effectLst/>
-                <a:latin typeface="BC Sans"/>
-                <a:ea typeface="Verdana" panose="020B0604030504040204" pitchFamily="34" charset="0"/>
-                <a:cs typeface="Verdana" panose="020B0604030504040204" pitchFamily="34" charset="0"/>
-              </a:rPr>
-              <a:t>TotalUnits</a:t>
-            </a:r>
-            <a:r>
-              <a:rPr lang="en-US" sz="1400" dirty="0">
-                <a:solidFill>
-                  <a:srgbClr val="3B305B"/>
-                </a:solidFill>
-                <a:effectLst/>
-                <a:latin typeface="BC Sans"/>
-                <a:ea typeface="Verdana" panose="020B0604030504040204" pitchFamily="34" charset="0"/>
-                <a:cs typeface="Verdana" panose="020B0604030504040204" pitchFamily="34" charset="0"/>
-              </a:rPr>
-              <a:t>}}</a:t>
-            </a:r>
           </a:p>
         </p:txBody>
       </p:sp>
@@ -4091,7 +3800,7 @@
                 <a:ea typeface="Verdana" panose="020B0604030504040204" pitchFamily="34" charset="0"/>
                 <a:cs typeface="Verdana" panose="020B0604030504040204" pitchFamily="34" charset="0"/>
               </a:rPr>
-              <a:t>   {{</a:t>
+              <a:t>  {{</a:t>
             </a:r>
             <a:r>
               <a:rPr lang="en-US" sz="1400" b="1" dirty="0" err="1">
@@ -4203,7 +3912,7 @@
         <p:spPr>
           <a:xfrm>
             <a:off x="3426793" y="6427723"/>
-            <a:ext cx="2228049" cy="523220"/>
+            <a:ext cx="2442411" cy="523220"/>
           </a:xfrm>
           <a:prstGeom prst="rect">
             <a:avLst/>
@@ -4302,10 +4011,10 @@
       </p:pic>
       <p:sp>
         <p:nvSpPr>
-          <p:cNvPr id="17" name="TextBox 8">
+          <p:cNvPr id="4" name="TextBox 3">
             <a:extLst>
               <a:ext uri="{FF2B5EF4-FFF2-40B4-BE49-F238E27FC236}">
-                <a16:creationId xmlns:a16="http://schemas.microsoft.com/office/drawing/2014/main" id="{2661C2CE-7AAD-2E59-A527-EDBEF23061BD}"/>
+                <a16:creationId xmlns:a16="http://schemas.microsoft.com/office/drawing/2014/main" id="{D987C2DB-75E9-BC61-A004-3493C73FB218}"/>
               </a:ext>
             </a:extLst>
           </p:cNvPr>
@@ -4314,8 +4023,8 @@
         </p:nvSpPr>
         <p:spPr>
           <a:xfrm>
-            <a:off x="2144105" y="3722905"/>
-            <a:ext cx="10993954" cy="1212320"/>
+            <a:off x="3580648" y="1559197"/>
+            <a:ext cx="6178979" cy="2670411"/>
           </a:xfrm>
           <a:prstGeom prst="rect">
             <a:avLst/>
@@ -4326,109 +4035,233 @@
           <a:bodyPr wrap="square">
             <a:spAutoFit/>
           </a:bodyPr>
-          <a:lstStyle>
-            <a:defPPr>
-              <a:defRPr lang="en-US"/>
-            </a:defPPr>
-            <a:lvl1pPr marL="0" algn="l" defTabSz="457200" rtl="0" eaLnBrk="1" latinLnBrk="0" hangingPunct="1">
-              <a:defRPr sz="1800" kern="1200">
-                <a:solidFill>
-                  <a:schemeClr val="tx1"/>
-                </a:solidFill>
-                <a:latin typeface="+mn-lt"/>
-                <a:ea typeface="+mn-ea"/>
-                <a:cs typeface="+mn-cs"/>
-              </a:defRPr>
-            </a:lvl1pPr>
-            <a:lvl2pPr marL="457200" algn="l" defTabSz="457200" rtl="0" eaLnBrk="1" latinLnBrk="0" hangingPunct="1">
-              <a:defRPr sz="1800" kern="1200">
-                <a:solidFill>
-                  <a:schemeClr val="tx1"/>
-                </a:solidFill>
-                <a:latin typeface="+mn-lt"/>
-                <a:ea typeface="+mn-ea"/>
-                <a:cs typeface="+mn-cs"/>
-              </a:defRPr>
-            </a:lvl2pPr>
-            <a:lvl3pPr marL="914400" algn="l" defTabSz="457200" rtl="0" eaLnBrk="1" latinLnBrk="0" hangingPunct="1">
-              <a:defRPr sz="1800" kern="1200">
-                <a:solidFill>
-                  <a:schemeClr val="tx1"/>
-                </a:solidFill>
-                <a:latin typeface="+mn-lt"/>
-                <a:ea typeface="+mn-ea"/>
-                <a:cs typeface="+mn-cs"/>
-              </a:defRPr>
-            </a:lvl3pPr>
-            <a:lvl4pPr marL="1371600" algn="l" defTabSz="457200" rtl="0" eaLnBrk="1" latinLnBrk="0" hangingPunct="1">
-              <a:defRPr sz="1800" kern="1200">
-                <a:solidFill>
-                  <a:schemeClr val="tx1"/>
-                </a:solidFill>
-                <a:latin typeface="+mn-lt"/>
-                <a:ea typeface="+mn-ea"/>
-                <a:cs typeface="+mn-cs"/>
-              </a:defRPr>
-            </a:lvl4pPr>
-            <a:lvl5pPr marL="1828800" algn="l" defTabSz="457200" rtl="0" eaLnBrk="1" latinLnBrk="0" hangingPunct="1">
-              <a:defRPr sz="1800" kern="1200">
-                <a:solidFill>
-                  <a:schemeClr val="tx1"/>
-                </a:solidFill>
-                <a:latin typeface="+mn-lt"/>
-                <a:ea typeface="+mn-ea"/>
-                <a:cs typeface="+mn-cs"/>
-              </a:defRPr>
-            </a:lvl5pPr>
-            <a:lvl6pPr marL="2286000" algn="l" defTabSz="457200" rtl="0" eaLnBrk="1" latinLnBrk="0" hangingPunct="1">
-              <a:defRPr sz="1800" kern="1200">
-                <a:solidFill>
-                  <a:schemeClr val="tx1"/>
-                </a:solidFill>
-                <a:latin typeface="+mn-lt"/>
-                <a:ea typeface="+mn-ea"/>
-                <a:cs typeface="+mn-cs"/>
-              </a:defRPr>
-            </a:lvl6pPr>
-            <a:lvl7pPr marL="2743200" algn="l" defTabSz="457200" rtl="0" eaLnBrk="1" latinLnBrk="0" hangingPunct="1">
-              <a:defRPr sz="1800" kern="1200">
-                <a:solidFill>
-                  <a:schemeClr val="tx1"/>
-                </a:solidFill>
-                <a:latin typeface="+mn-lt"/>
-                <a:ea typeface="+mn-ea"/>
-                <a:cs typeface="+mn-cs"/>
-              </a:defRPr>
-            </a:lvl7pPr>
-            <a:lvl8pPr marL="3200400" algn="l" defTabSz="457200" rtl="0" eaLnBrk="1" latinLnBrk="0" hangingPunct="1">
-              <a:defRPr sz="1800" kern="1200">
-                <a:solidFill>
-                  <a:schemeClr val="tx1"/>
-                </a:solidFill>
-                <a:latin typeface="+mn-lt"/>
-                <a:ea typeface="+mn-ea"/>
-                <a:cs typeface="+mn-cs"/>
-              </a:defRPr>
-            </a:lvl8pPr>
-            <a:lvl9pPr marL="3657600" algn="l" defTabSz="457200" rtl="0" eaLnBrk="1" latinLnBrk="0" hangingPunct="1">
-              <a:defRPr sz="1800" kern="1200">
-                <a:solidFill>
-                  <a:schemeClr val="tx1"/>
-                </a:solidFill>
-                <a:latin typeface="+mn-lt"/>
-                <a:ea typeface="+mn-ea"/>
-                <a:cs typeface="+mn-cs"/>
-              </a:defRPr>
-            </a:lvl9pPr>
-          </a:lstStyle>
-          <a:p>
-            <a:pPr marL="1496060" marR="3183255">
+          <a:lstStyle/>
+          <a:p>
+            <a:pPr>
               <a:lnSpc>
-                <a:spcPct val="123000"/>
+                <a:spcPct val="110000"/>
+              </a:lnSpc>
+              <a:spcAft>
+                <a:spcPts val="300"/>
+              </a:spcAft>
+            </a:pPr>
+            <a:r>
+              <a:rPr lang="en-US" sz="2200" b="1" dirty="0">
+                <a:solidFill>
+                  <a:srgbClr val="3B305B"/>
+                </a:solidFill>
+                <a:latin typeface="BC Sans"/>
+                <a:ea typeface="Verdana" panose="020B0604030504040204" pitchFamily="34" charset="0"/>
+                <a:cs typeface="Verdana" panose="020B0604030504040204" pitchFamily="34" charset="0"/>
+              </a:rPr>
+              <a:t>{{</a:t>
+            </a:r>
+            <a:r>
+              <a:rPr lang="en-US" sz="2200" b="1" dirty="0" err="1">
+                <a:solidFill>
+                  <a:srgbClr val="3B305B"/>
+                </a:solidFill>
+                <a:latin typeface="BC Sans"/>
+                <a:ea typeface="Verdana" panose="020B0604030504040204" pitchFamily="34" charset="0"/>
+                <a:cs typeface="Verdana" panose="020B0604030504040204" pitchFamily="34" charset="0"/>
+              </a:rPr>
+              <a:t>ResidenceName</a:t>
+            </a:r>
+            <a:r>
+              <a:rPr lang="en-US" sz="2200" b="1" dirty="0">
+                <a:solidFill>
+                  <a:srgbClr val="3B305B"/>
+                </a:solidFill>
+                <a:latin typeface="BC Sans"/>
+                <a:ea typeface="Verdana" panose="020B0604030504040204" pitchFamily="34" charset="0"/>
+                <a:cs typeface="Verdana" panose="020B0604030504040204" pitchFamily="34" charset="0"/>
+              </a:rPr>
+              <a:t>}}</a:t>
+            </a:r>
+          </a:p>
+          <a:p>
+            <a:pPr>
+              <a:lnSpc>
+                <a:spcPct val="110000"/>
+              </a:lnSpc>
+              <a:spcAft>
+                <a:spcPts val="300"/>
+              </a:spcAft>
+            </a:pPr>
+            <a:r>
+              <a:rPr lang="en-US" sz="2000" b="1" dirty="0">
+                <a:solidFill>
+                  <a:srgbClr val="3B305B"/>
+                </a:solidFill>
+                <a:latin typeface="BC Sans"/>
+                <a:ea typeface="Verdana" panose="020B0604030504040204" pitchFamily="34" charset="0"/>
+                <a:cs typeface="Verdana" panose="020B0604030504040204" pitchFamily="34" charset="0"/>
+              </a:rPr>
+              <a:t>{{</a:t>
+            </a:r>
+            <a:r>
+              <a:rPr lang="en-US" sz="2000" b="1" dirty="0" err="1">
+                <a:solidFill>
+                  <a:srgbClr val="3B305B"/>
+                </a:solidFill>
+                <a:latin typeface="BC Sans"/>
+                <a:ea typeface="Verdana" panose="020B0604030504040204" pitchFamily="34" charset="0"/>
+                <a:cs typeface="Verdana" panose="020B0604030504040204" pitchFamily="34" charset="0"/>
+              </a:rPr>
+              <a:t>RegistrantName</a:t>
+            </a:r>
+            <a:r>
+              <a:rPr lang="en-US" sz="2000" b="1" dirty="0">
+                <a:solidFill>
+                  <a:srgbClr val="3B305B"/>
+                </a:solidFill>
+                <a:latin typeface="BC Sans"/>
+                <a:ea typeface="Verdana" panose="020B0604030504040204" pitchFamily="34" charset="0"/>
+                <a:cs typeface="Verdana" panose="020B0604030504040204" pitchFamily="34" charset="0"/>
+              </a:rPr>
+              <a:t>}}</a:t>
+            </a:r>
+          </a:p>
+          <a:p>
+            <a:pPr>
+              <a:lnSpc>
+                <a:spcPct val="110000"/>
+              </a:lnSpc>
+              <a:spcAft>
+                <a:spcPts val="300"/>
+              </a:spcAft>
+            </a:pPr>
+            <a:r>
+              <a:rPr lang="en-US" sz="1600" dirty="0">
+                <a:solidFill>
+                  <a:srgbClr val="3B305B"/>
+                </a:solidFill>
+                <a:latin typeface="BC Sans"/>
+                <a:ea typeface="Verdana" panose="020B0604030504040204" pitchFamily="34" charset="0"/>
+                <a:cs typeface="Verdana" panose="020B0604030504040204" pitchFamily="34" charset="0"/>
+              </a:rPr>
+              <a:t>{{</a:t>
+            </a:r>
+            <a:r>
+              <a:rPr lang="en-US" sz="1600" dirty="0" err="1">
+                <a:solidFill>
+                  <a:srgbClr val="3B305B"/>
+                </a:solidFill>
+                <a:latin typeface="BC Sans"/>
+                <a:ea typeface="Verdana" panose="020B0604030504040204" pitchFamily="34" charset="0"/>
+                <a:cs typeface="Verdana" panose="020B0604030504040204" pitchFamily="34" charset="0"/>
+              </a:rPr>
+              <a:t>ResidenceAddress</a:t>
+            </a:r>
+            <a:r>
+              <a:rPr lang="en-US" sz="1600" dirty="0">
+                <a:solidFill>
+                  <a:srgbClr val="3B305B"/>
+                </a:solidFill>
+                <a:latin typeface="BC Sans"/>
+                <a:ea typeface="Verdana" panose="020B0604030504040204" pitchFamily="34" charset="0"/>
+                <a:cs typeface="Verdana" panose="020B0604030504040204" pitchFamily="34" charset="0"/>
+              </a:rPr>
+              <a:t>}}</a:t>
+            </a:r>
+          </a:p>
+          <a:p>
+            <a:pPr>
+              <a:lnSpc>
+                <a:spcPct val="110000"/>
+              </a:lnSpc>
+              <a:spcAft>
+                <a:spcPts val="300"/>
+              </a:spcAft>
+            </a:pPr>
+            <a:r>
+              <a:rPr lang="en-US" sz="1400" dirty="0">
+                <a:solidFill>
+                  <a:srgbClr val="C00000"/>
+                </a:solidFill>
+                <a:latin typeface="BC Sans"/>
+                <a:ea typeface="Verdana" panose="020B0604030504040204" pitchFamily="34" charset="0"/>
+                <a:cs typeface="Verdana" panose="020B0604030504040204" pitchFamily="34" charset="0"/>
+              </a:rPr>
+              <a:t>Class: {{</a:t>
+            </a:r>
+            <a:r>
+              <a:rPr lang="en-US" sz="1400" dirty="0" err="1">
+                <a:solidFill>
+                  <a:srgbClr val="C00000"/>
+                </a:solidFill>
+                <a:latin typeface="BC Sans"/>
+                <a:ea typeface="Verdana" panose="020B0604030504040204" pitchFamily="34" charset="0"/>
+                <a:cs typeface="Verdana" panose="020B0604030504040204" pitchFamily="34" charset="0"/>
+              </a:rPr>
+              <a:t>ResidenceClassType</a:t>
+            </a:r>
+            <a:r>
+              <a:rPr lang="en-US" sz="1400" dirty="0">
+                <a:solidFill>
+                  <a:srgbClr val="C00000"/>
+                </a:solidFill>
+                <a:latin typeface="BC Sans"/>
+                <a:ea typeface="Verdana" panose="020B0604030504040204" pitchFamily="34" charset="0"/>
+                <a:cs typeface="Verdana" panose="020B0604030504040204" pitchFamily="34" charset="0"/>
+              </a:rPr>
+              <a:t>}}</a:t>
+            </a:r>
+          </a:p>
+          <a:p>
+            <a:pPr>
+              <a:lnSpc>
+                <a:spcPct val="110000"/>
+              </a:lnSpc>
+              <a:spcAft>
+                <a:spcPts val="300"/>
+              </a:spcAft>
+            </a:pPr>
+            <a:r>
+              <a:rPr lang="en-US" sz="1400" dirty="0">
+                <a:solidFill>
+                  <a:srgbClr val="3B305B"/>
+                </a:solidFill>
+                <a:latin typeface="BC Sans"/>
+                <a:ea typeface="Verdana" panose="020B0604030504040204" pitchFamily="34" charset="0"/>
+                <a:cs typeface="Verdana" panose="020B0604030504040204" pitchFamily="34" charset="0"/>
+              </a:rPr>
+              <a:t>Number of units: {{</a:t>
+            </a:r>
+            <a:r>
+              <a:rPr lang="en-US" sz="1400" dirty="0" err="1">
+                <a:solidFill>
+                  <a:srgbClr val="3B305B"/>
+                </a:solidFill>
+                <a:latin typeface="BC Sans"/>
+                <a:ea typeface="Verdana" panose="020B0604030504040204" pitchFamily="34" charset="0"/>
+                <a:cs typeface="Verdana" panose="020B0604030504040204" pitchFamily="34" charset="0"/>
+              </a:rPr>
+              <a:t>TotalUnits</a:t>
+            </a:r>
+            <a:r>
+              <a:rPr lang="en-US" sz="1400" dirty="0">
+                <a:solidFill>
+                  <a:srgbClr val="3B305B"/>
+                </a:solidFill>
+                <a:latin typeface="BC Sans"/>
+                <a:ea typeface="Verdana" panose="020B0604030504040204" pitchFamily="34" charset="0"/>
+                <a:cs typeface="Verdana" panose="020B0604030504040204" pitchFamily="34" charset="0"/>
+              </a:rPr>
+              <a:t>}}</a:t>
+            </a:r>
+          </a:p>
+          <a:p>
+            <a:pPr>
+              <a:lnSpc>
+                <a:spcPct val="110000"/>
               </a:lnSpc>
               <a:spcBef>
-                <a:spcPts val="515"/>
+                <a:spcPts val="600"/>
               </a:spcBef>
+              <a:spcAft>
+                <a:spcPts val="300"/>
+              </a:spcAft>
             </a:pPr>
             <a:r>
               <a:rPr lang="en-US" sz="1400" dirty="0">
@@ -4441,11 +4274,10 @@
               <a:t>Assisted Living Service(s): {{</a:t>
             </a:r>
             <a:r>
-              <a:rPr lang="en-US" sz="1400" b="0" dirty="0">
-                <a:solidFill>
-                  <a:srgbClr val="C00000"/>
-                </a:solidFill>
-                <a:effectLst/>
+              <a:rPr lang="en-US" sz="1400" dirty="0">
+                <a:solidFill>
+                  <a:srgbClr val="A31515"/>
+                </a:solidFill>
                 <a:latin typeface="Consolas" panose="020B0609020204030204" pitchFamily="49" charset="0"/>
               </a:rPr>
               <a:t>Services</a:t>
@@ -4462,30 +4294,16 @@
             </a:r>
           </a:p>
           <a:p>
-            <a:pPr marL="1496060" marR="3183255">
+            <a:pPr>
               <a:lnSpc>
-                <a:spcPct val="123000"/>
+                <a:spcPct val="110000"/>
               </a:lnSpc>
               <a:spcBef>
-                <a:spcPts val="515"/>
+                <a:spcPts val="600"/>
               </a:spcBef>
-            </a:pPr>
-            <a:endParaRPr lang="en-US" sz="800" dirty="0">
-              <a:solidFill>
-                <a:srgbClr val="3B305B"/>
-              </a:solidFill>
-              <a:latin typeface="BC Sans"/>
-              <a:ea typeface="Verdana" panose="020B0604030504040204" pitchFamily="34" charset="0"/>
-            </a:endParaRPr>
-          </a:p>
-          <a:p>
-            <a:pPr marL="1496060" marR="3183255">
-              <a:lnSpc>
-                <a:spcPct val="123000"/>
-              </a:lnSpc>
-              <a:spcBef>
-                <a:spcPts val="515"/>
-              </a:spcBef>
+              <a:spcAft>
+                <a:spcPts val="300"/>
+              </a:spcAft>
             </a:pPr>
             <a:r>
               <a:rPr lang="en-US" sz="1400" b="1" dirty="0">
@@ -4494,18 +4312,19 @@
                 </a:solidFill>
                 <a:latin typeface="BC Sans"/>
                 <a:ea typeface="Verdana" panose="020B0604030504040204" pitchFamily="34" charset="0"/>
+                <a:cs typeface="Verdana" panose="020B0604030504040204" pitchFamily="34" charset="0"/>
               </a:rPr>
               <a:t>CONDITIONS:</a:t>
             </a:r>
           </a:p>
           <a:p>
-            <a:pPr marL="1496060" marR="3183255">
+            <a:pPr>
               <a:lnSpc>
-                <a:spcPct val="123000"/>
+                <a:spcPct val="110000"/>
               </a:lnSpc>
-              <a:spcBef>
-                <a:spcPts val="515"/>
-              </a:spcBef>
+              <a:spcAft>
+                <a:spcPts val="300"/>
+              </a:spcAft>
             </a:pPr>
             <a:r>
               <a:rPr lang="en-US" sz="1400" dirty="0">
@@ -4514,6 +4333,7 @@
                 </a:solidFill>
                 <a:latin typeface="BC Sans"/>
                 <a:ea typeface="Verdana" panose="020B0604030504040204" pitchFamily="34" charset="0"/>
+                <a:cs typeface="Verdana" panose="020B0604030504040204" pitchFamily="34" charset="0"/>
               </a:rPr>
               <a:t>{{</a:t>
             </a:r>
@@ -4524,6 +4344,7 @@
                 </a:solidFill>
                 <a:latin typeface="BC Sans"/>
                 <a:ea typeface="Verdana" panose="020B0604030504040204" pitchFamily="34" charset="0"/>
+                <a:cs typeface="Verdana" panose="020B0604030504040204" pitchFamily="34" charset="0"/>
               </a:rPr>
               <a:t>ConditionAndDescription</a:t>
             </a:r>
@@ -4534,15 +4355,10 @@
                 </a:solidFill>
                 <a:latin typeface="BC Sans"/>
                 <a:ea typeface="Verdana" panose="020B0604030504040204" pitchFamily="34" charset="0"/>
+                <a:cs typeface="Verdana" panose="020B0604030504040204" pitchFamily="34" charset="0"/>
               </a:rPr>
               <a:t>}} {{ConditionAndDescription1}}</a:t>
             </a:r>
-            <a:endParaRPr lang="en-CA" sz="800" dirty="0">
-              <a:effectLst/>
-              <a:latin typeface="BC Sans"/>
-              <a:ea typeface="Verdana" panose="020B0604030504040204" pitchFamily="34" charset="0"/>
-              <a:cs typeface="Verdana" panose="020B0604030504040204" pitchFamily="34" charset="0"/>
-            </a:endParaRPr>
           </a:p>
         </p:txBody>
       </p:sp>

--- a/ALR-DocgenTemplates/CertificateBackground_SU.pptx
+++ b/ALR-DocgenTemplates/CertificateBackground_SU.pptx
@@ -272,7 +272,7 @@
           <a:p>
             <a:fld id="{E0C45857-5204-4055-BBBB-5D81F6C0DEE1}" type="datetimeFigureOut">
               <a:rPr lang="en-US" smtClean="0"/>
-              <a:t>4/30/2026</a:t>
+              <a:t>7/29/2026</a:t>
             </a:fld>
             <a:endParaRPr lang="en-US"/>
           </a:p>
@@ -442,7 +442,7 @@
           <a:p>
             <a:fld id="{E0C45857-5204-4055-BBBB-5D81F6C0DEE1}" type="datetimeFigureOut">
               <a:rPr lang="en-US" smtClean="0"/>
-              <a:t>4/30/2026</a:t>
+              <a:t>7/29/2026</a:t>
             </a:fld>
             <a:endParaRPr lang="en-US"/>
           </a:p>
@@ -622,7 +622,7 @@
           <a:p>
             <a:fld id="{E0C45857-5204-4055-BBBB-5D81F6C0DEE1}" type="datetimeFigureOut">
               <a:rPr lang="en-US" smtClean="0"/>
-              <a:t>4/30/2026</a:t>
+              <a:t>7/29/2026</a:t>
             </a:fld>
             <a:endParaRPr lang="en-US"/>
           </a:p>
@@ -792,7 +792,7 @@
           <a:p>
             <a:fld id="{E0C45857-5204-4055-BBBB-5D81F6C0DEE1}" type="datetimeFigureOut">
               <a:rPr lang="en-US" smtClean="0"/>
-              <a:t>4/30/2026</a:t>
+              <a:t>7/29/2026</a:t>
             </a:fld>
             <a:endParaRPr lang="en-US"/>
           </a:p>
@@ -1036,7 +1036,7 @@
           <a:p>
             <a:fld id="{E0C45857-5204-4055-BBBB-5D81F6C0DEE1}" type="datetimeFigureOut">
               <a:rPr lang="en-US" smtClean="0"/>
-              <a:t>4/30/2026</a:t>
+              <a:t>7/29/2026</a:t>
             </a:fld>
             <a:endParaRPr lang="en-US"/>
           </a:p>
@@ -1268,7 +1268,7 @@
           <a:p>
             <a:fld id="{E0C45857-5204-4055-BBBB-5D81F6C0DEE1}" type="datetimeFigureOut">
               <a:rPr lang="en-US" smtClean="0"/>
-              <a:t>4/30/2026</a:t>
+              <a:t>7/29/2026</a:t>
             </a:fld>
             <a:endParaRPr lang="en-US"/>
           </a:p>
@@ -1635,7 +1635,7 @@
           <a:p>
             <a:fld id="{E0C45857-5204-4055-BBBB-5D81F6C0DEE1}" type="datetimeFigureOut">
               <a:rPr lang="en-US" smtClean="0"/>
-              <a:t>4/30/2026</a:t>
+              <a:t>7/29/2026</a:t>
             </a:fld>
             <a:endParaRPr lang="en-US"/>
           </a:p>
@@ -1753,7 +1753,7 @@
           <a:p>
             <a:fld id="{E0C45857-5204-4055-BBBB-5D81F6C0DEE1}" type="datetimeFigureOut">
               <a:rPr lang="en-US" smtClean="0"/>
-              <a:t>4/30/2026</a:t>
+              <a:t>7/29/2026</a:t>
             </a:fld>
             <a:endParaRPr lang="en-US"/>
           </a:p>
@@ -1848,7 +1848,7 @@
           <a:p>
             <a:fld id="{E0C45857-5204-4055-BBBB-5D81F6C0DEE1}" type="datetimeFigureOut">
               <a:rPr lang="en-US" smtClean="0"/>
-              <a:t>4/30/2026</a:t>
+              <a:t>7/29/2026</a:t>
             </a:fld>
             <a:endParaRPr lang="en-US"/>
           </a:p>
@@ -2125,7 +2125,7 @@
           <a:p>
             <a:fld id="{E0C45857-5204-4055-BBBB-5D81F6C0DEE1}" type="datetimeFigureOut">
               <a:rPr lang="en-US" smtClean="0"/>
-              <a:t>4/30/2026</a:t>
+              <a:t>7/29/2026</a:t>
             </a:fld>
             <a:endParaRPr lang="en-US"/>
           </a:p>
@@ -2382,7 +2382,7 @@
           <a:p>
             <a:fld id="{E0C45857-5204-4055-BBBB-5D81F6C0DEE1}" type="datetimeFigureOut">
               <a:rPr lang="en-US" smtClean="0"/>
-              <a:t>4/30/2026</a:t>
+              <a:t>7/29/2026</a:t>
             </a:fld>
             <a:endParaRPr lang="en-US"/>
           </a:p>
@@ -2595,7 +2595,7 @@
           <a:p>
             <a:fld id="{E0C45857-5204-4055-BBBB-5D81F6C0DEE1}" type="datetimeFigureOut">
               <a:rPr lang="en-US" smtClean="0"/>
-              <a:t>4/30/2026</a:t>
+              <a:t>7/29/2026</a:t>
             </a:fld>
             <a:endParaRPr lang="en-US"/>
           </a:p>
@@ -3076,7 +3076,7 @@
         </p:blipFill>
         <p:spPr bwMode="auto">
           <a:xfrm>
-            <a:off x="-57248" y="16575"/>
+            <a:off x="0" y="-6004"/>
             <a:ext cx="10125076" cy="7784407"/>
           </a:xfrm>
           <a:prstGeom prst="rect">
@@ -3554,8 +3554,8 @@
         </p:nvSpPr>
         <p:spPr>
           <a:xfrm>
-            <a:off x="1684421" y="676025"/>
-            <a:ext cx="8469856" cy="430887"/>
+            <a:off x="1512000" y="352800"/>
+            <a:ext cx="8380800" cy="430887"/>
           </a:xfrm>
           <a:prstGeom prst="rect">
             <a:avLst/>
@@ -3694,8 +3694,8 @@
         </p:nvCxnSpPr>
         <p:spPr>
           <a:xfrm>
-            <a:off x="3246120" y="1289304"/>
-            <a:ext cx="6035040" cy="0"/>
+            <a:off x="3096000" y="910800"/>
+            <a:ext cx="6163200" cy="0"/>
           </a:xfrm>
           <a:prstGeom prst="line">
             <a:avLst/>
@@ -3997,8 +3997,8 @@
         </p:blipFill>
         <p:spPr>
           <a:xfrm>
-            <a:off x="2207164" y="1681641"/>
-            <a:ext cx="1181100" cy="1181100"/>
+            <a:off x="1810800" y="1584000"/>
+            <a:ext cx="1051200" cy="1051200"/>
           </a:xfrm>
           <a:prstGeom prst="rect">
             <a:avLst/>
@@ -4023,8 +4023,8 @@
         </p:nvSpPr>
         <p:spPr>
           <a:xfrm>
-            <a:off x="3580648" y="1559197"/>
-            <a:ext cx="6178979" cy="2670411"/>
+            <a:off x="3027599" y="1123199"/>
+            <a:ext cx="6177600" cy="3560400"/>
           </a:xfrm>
           <a:prstGeom prst="rect">
             <a:avLst/>
@@ -4036,6 +4036,92 @@
             <a:spAutoFit/>
           </a:bodyPr>
           <a:lstStyle/>
+          <a:p>
+            <a:pPr>
+              <a:lnSpc>
+                <a:spcPct val="200000"/>
+              </a:lnSpc>
+              <a:spcAft>
+                <a:spcPts val="300"/>
+              </a:spcAft>
+            </a:pPr>
+            <a:r>
+              <a:rPr lang="en-US" sz="1900" b="1" dirty="0">
+                <a:solidFill>
+                  <a:srgbClr val="3B305B"/>
+                </a:solidFill>
+                <a:latin typeface="BC Sans"/>
+                <a:ea typeface="Verdana" panose="020B0604030504040204" pitchFamily="34" charset="0"/>
+                <a:cs typeface="Verdana" panose="020B0604030504040204" pitchFamily="34" charset="0"/>
+              </a:rPr>
+              <a:t>{{</a:t>
+            </a:r>
+            <a:r>
+              <a:rPr lang="en-US" sz="1900" b="1" dirty="0" err="1">
+                <a:solidFill>
+                  <a:srgbClr val="3B305B"/>
+                </a:solidFill>
+                <a:latin typeface="BC Sans"/>
+                <a:ea typeface="Verdana" panose="020B0604030504040204" pitchFamily="34" charset="0"/>
+                <a:cs typeface="Verdana" panose="020B0604030504040204" pitchFamily="34" charset="0"/>
+              </a:rPr>
+              <a:t>ResidenceName</a:t>
+            </a:r>
+            <a:r>
+              <a:rPr lang="en-US" sz="1900" b="1" dirty="0">
+                <a:solidFill>
+                  <a:srgbClr val="3B305B"/>
+                </a:solidFill>
+                <a:latin typeface="BC Sans"/>
+                <a:ea typeface="Verdana" panose="020B0604030504040204" pitchFamily="34" charset="0"/>
+                <a:cs typeface="Verdana" panose="020B0604030504040204" pitchFamily="34" charset="0"/>
+              </a:rPr>
+              <a:t>}}</a:t>
+            </a:r>
+          </a:p>
+          <a:p>
+            <a:pPr>
+              <a:lnSpc>
+                <a:spcPct val="200000"/>
+              </a:lnSpc>
+              <a:spcAft>
+                <a:spcPts val="300"/>
+              </a:spcAft>
+            </a:pPr>
+            <a:r>
+              <a:rPr lang="en-US" sz="1400" b="1" dirty="0">
+                <a:solidFill>
+                  <a:srgbClr val="3B305B"/>
+                </a:solidFill>
+                <a:latin typeface="BC Sans"/>
+                <a:ea typeface="Verdana" panose="020B0604030504040204" pitchFamily="34" charset="0"/>
+                <a:cs typeface="Verdana" panose="020B0604030504040204" pitchFamily="34" charset="0"/>
+              </a:rPr>
+              <a:t>{{</a:t>
+            </a:r>
+            <a:r>
+              <a:rPr lang="en-US" sz="1400" b="1" dirty="0" err="1">
+                <a:solidFill>
+                  <a:srgbClr val="3B305B"/>
+                </a:solidFill>
+                <a:latin typeface="BC Sans"/>
+                <a:ea typeface="Verdana" panose="020B0604030504040204" pitchFamily="34" charset="0"/>
+                <a:cs typeface="Verdana" panose="020B0604030504040204" pitchFamily="34" charset="0"/>
+              </a:rPr>
+              <a:t>RegistrantName</a:t>
+            </a:r>
+            <a:r>
+              <a:rPr lang="en-US" sz="1400" b="1" dirty="0">
+                <a:solidFill>
+                  <a:srgbClr val="3B305B"/>
+                </a:solidFill>
+                <a:latin typeface="BC Sans"/>
+                <a:ea typeface="Verdana" panose="020B0604030504040204" pitchFamily="34" charset="0"/>
+                <a:cs typeface="Verdana" panose="020B0604030504040204" pitchFamily="34" charset="0"/>
+              </a:rPr>
+              <a:t>}}</a:t>
+            </a:r>
+          </a:p>
           <a:p>
             <a:pPr>
               <a:lnSpc>
@@ -4046,7 +4132,7 @@
               </a:spcAft>
             </a:pPr>
             <a:r>
-              <a:rPr lang="en-US" sz="2200" b="1" dirty="0">
+              <a:rPr lang="en-US" sz="1200" dirty="0">
                 <a:solidFill>
                   <a:srgbClr val="3B305B"/>
                 </a:solidFill>
@@ -4057,7 +4143,7 @@
               <a:t>{{</a:t>
             </a:r>
             <a:r>
-              <a:rPr lang="en-US" sz="2200" b="1" dirty="0" err="1">
+              <a:rPr lang="en-US" sz="1200" dirty="0" err="1">
                 <a:solidFill>
                   <a:srgbClr val="3B305B"/>
                 </a:solidFill>
@@ -4065,10 +4151,10 @@
                 <a:ea typeface="Verdana" panose="020B0604030504040204" pitchFamily="34" charset="0"/>
                 <a:cs typeface="Verdana" panose="020B0604030504040204" pitchFamily="34" charset="0"/>
               </a:rPr>
-              <a:t>ResidenceName</a:t>
-            </a:r>
-            <a:r>
-              <a:rPr lang="en-US" sz="2200" b="1" dirty="0">
+              <a:t>ResidenceAddress</a:t>
+            </a:r>
+            <a:r>
+              <a:rPr lang="en-US" sz="1200" dirty="0">
                 <a:solidFill>
                   <a:srgbClr val="3B305B"/>
                 </a:solidFill>
@@ -4088,8 +4174,80 @@
                 <a:spcPts val="300"/>
               </a:spcAft>
             </a:pPr>
-            <a:r>
-              <a:rPr lang="en-US" sz="2000" b="1" dirty="0">
+            <a:endParaRPr lang="en-US" sz="1200" dirty="0">
+              <a:solidFill>
+                <a:srgbClr val="3B305B"/>
+              </a:solidFill>
+              <a:latin typeface="BC Sans"/>
+              <a:ea typeface="Verdana" panose="020B0604030504040204" pitchFamily="34" charset="0"/>
+              <a:cs typeface="Verdana" panose="020B0604030504040204" pitchFamily="34" charset="0"/>
+            </a:endParaRPr>
+          </a:p>
+          <a:p>
+            <a:pPr>
+              <a:lnSpc>
+                <a:spcPct val="150000"/>
+              </a:lnSpc>
+              <a:spcAft>
+                <a:spcPts val="300"/>
+              </a:spcAft>
+            </a:pPr>
+            <a:r>
+              <a:rPr lang="en-US" sz="1400" dirty="0">
+                <a:solidFill>
+                  <a:srgbClr val="C00000"/>
+                </a:solidFill>
+                <a:latin typeface="BC Sans"/>
+                <a:ea typeface="Verdana" panose="020B0604030504040204" pitchFamily="34" charset="0"/>
+                <a:cs typeface="Verdana" panose="020B0604030504040204" pitchFamily="34" charset="0"/>
+              </a:rPr>
+              <a:t>Class: {{</a:t>
+            </a:r>
+            <a:r>
+              <a:rPr lang="en-US" sz="1400" dirty="0" err="1">
+                <a:solidFill>
+                  <a:srgbClr val="C00000"/>
+                </a:solidFill>
+                <a:latin typeface="BC Sans"/>
+                <a:ea typeface="Verdana" panose="020B0604030504040204" pitchFamily="34" charset="0"/>
+                <a:cs typeface="Verdana" panose="020B0604030504040204" pitchFamily="34" charset="0"/>
+              </a:rPr>
+              <a:t>ResidenceClassType</a:t>
+            </a:r>
+            <a:r>
+              <a:rPr lang="en-US" sz="1400" dirty="0">
+                <a:solidFill>
+                  <a:srgbClr val="C00000"/>
+                </a:solidFill>
+                <a:latin typeface="BC Sans"/>
+                <a:ea typeface="Verdana" panose="020B0604030504040204" pitchFamily="34" charset="0"/>
+                <a:cs typeface="Verdana" panose="020B0604030504040204" pitchFamily="34" charset="0"/>
+              </a:rPr>
+              <a:t>}}</a:t>
+            </a:r>
+          </a:p>
+          <a:p>
+            <a:pPr>
+              <a:lnSpc>
+                <a:spcPct val="150000"/>
+              </a:lnSpc>
+              <a:spcAft>
+                <a:spcPts val="300"/>
+              </a:spcAft>
+            </a:pPr>
+            <a:r>
+              <a:rPr lang="en-US" sz="1400" dirty="0">
+                <a:solidFill>
+                  <a:srgbClr val="3B305B"/>
+                </a:solidFill>
+                <a:latin typeface="BC Sans"/>
+                <a:ea typeface="Verdana" panose="020B0604030504040204" pitchFamily="34" charset="0"/>
+                <a:cs typeface="Verdana" panose="020B0604030504040204" pitchFamily="34" charset="0"/>
+              </a:rPr>
+              <a:t>Number of units: </a:t>
+            </a:r>
+            <a:r>
+              <a:rPr lang="en-US" sz="1400" b="1" dirty="0">
                 <a:solidFill>
                   <a:srgbClr val="3B305B"/>
                 </a:solidFill>
@@ -4100,7 +4258,7 @@
               <a:t>{{</a:t>
             </a:r>
             <a:r>
-              <a:rPr lang="en-US" sz="2000" b="1" dirty="0" err="1">
+              <a:rPr lang="en-US" sz="1400" b="1" dirty="0" err="1">
                 <a:solidFill>
                   <a:srgbClr val="3B305B"/>
                 </a:solidFill>
@@ -4108,10 +4266,10 @@
                 <a:ea typeface="Verdana" panose="020B0604030504040204" pitchFamily="34" charset="0"/>
                 <a:cs typeface="Verdana" panose="020B0604030504040204" pitchFamily="34" charset="0"/>
               </a:rPr>
-              <a:t>RegistrantName</a:t>
-            </a:r>
-            <a:r>
-              <a:rPr lang="en-US" sz="2000" b="1" dirty="0">
+              <a:t>TotalUnits</a:t>
+            </a:r>
+            <a:r>
+              <a:rPr lang="en-US" sz="1400" b="1" dirty="0">
                 <a:solidFill>
                   <a:srgbClr val="3B305B"/>
                 </a:solidFill>
@@ -4125,136 +4283,7 @@
           <a:p>
             <a:pPr>
               <a:lnSpc>
-                <a:spcPct val="110000"/>
-              </a:lnSpc>
-              <a:spcAft>
-                <a:spcPts val="300"/>
-              </a:spcAft>
-            </a:pPr>
-            <a:r>
-              <a:rPr lang="en-US" sz="1600" dirty="0">
-                <a:solidFill>
-                  <a:srgbClr val="3B305B"/>
-                </a:solidFill>
-                <a:latin typeface="BC Sans"/>
-                <a:ea typeface="Verdana" panose="020B0604030504040204" pitchFamily="34" charset="0"/>
-                <a:cs typeface="Verdana" panose="020B0604030504040204" pitchFamily="34" charset="0"/>
-              </a:rPr>
-              <a:t>{{</a:t>
-            </a:r>
-            <a:r>
-              <a:rPr lang="en-US" sz="1600" dirty="0" err="1">
-                <a:solidFill>
-                  <a:srgbClr val="3B305B"/>
-                </a:solidFill>
-                <a:latin typeface="BC Sans"/>
-                <a:ea typeface="Verdana" panose="020B0604030504040204" pitchFamily="34" charset="0"/>
-                <a:cs typeface="Verdana" panose="020B0604030504040204" pitchFamily="34" charset="0"/>
-              </a:rPr>
-              <a:t>ResidenceAddress</a:t>
-            </a:r>
-            <a:r>
-              <a:rPr lang="en-US" sz="1600" dirty="0">
-                <a:solidFill>
-                  <a:srgbClr val="3B305B"/>
-                </a:solidFill>
-                <a:latin typeface="BC Sans"/>
-                <a:ea typeface="Verdana" panose="020B0604030504040204" pitchFamily="34" charset="0"/>
-                <a:cs typeface="Verdana" panose="020B0604030504040204" pitchFamily="34" charset="0"/>
-              </a:rPr>
-              <a:t>}}</a:t>
-            </a:r>
-          </a:p>
-          <a:p>
-            <a:pPr>
-              <a:lnSpc>
-                <a:spcPct val="110000"/>
-              </a:lnSpc>
-              <a:spcAft>
-                <a:spcPts val="300"/>
-              </a:spcAft>
-            </a:pPr>
-            <a:r>
-              <a:rPr lang="en-US" sz="1400" dirty="0">
-                <a:solidFill>
-                  <a:srgbClr val="C00000"/>
-                </a:solidFill>
-                <a:latin typeface="BC Sans"/>
-                <a:ea typeface="Verdana" panose="020B0604030504040204" pitchFamily="34" charset="0"/>
-                <a:cs typeface="Verdana" panose="020B0604030504040204" pitchFamily="34" charset="0"/>
-              </a:rPr>
-              <a:t>Class: {{</a:t>
-            </a:r>
-            <a:r>
-              <a:rPr lang="en-US" sz="1400" dirty="0" err="1">
-                <a:solidFill>
-                  <a:srgbClr val="C00000"/>
-                </a:solidFill>
-                <a:latin typeface="BC Sans"/>
-                <a:ea typeface="Verdana" panose="020B0604030504040204" pitchFamily="34" charset="0"/>
-                <a:cs typeface="Verdana" panose="020B0604030504040204" pitchFamily="34" charset="0"/>
-              </a:rPr>
-              <a:t>ResidenceClassType</a:t>
-            </a:r>
-            <a:r>
-              <a:rPr lang="en-US" sz="1400" dirty="0">
-                <a:solidFill>
-                  <a:srgbClr val="C00000"/>
-                </a:solidFill>
-                <a:latin typeface="BC Sans"/>
-                <a:ea typeface="Verdana" panose="020B0604030504040204" pitchFamily="34" charset="0"/>
-                <a:cs typeface="Verdana" panose="020B0604030504040204" pitchFamily="34" charset="0"/>
-              </a:rPr>
-              <a:t>}}</a:t>
-            </a:r>
-          </a:p>
-          <a:p>
-            <a:pPr>
-              <a:lnSpc>
-                <a:spcPct val="110000"/>
-              </a:lnSpc>
-              <a:spcAft>
-                <a:spcPts val="300"/>
-              </a:spcAft>
-            </a:pPr>
-            <a:r>
-              <a:rPr lang="en-US" sz="1400" dirty="0">
-                <a:solidFill>
-                  <a:srgbClr val="3B305B"/>
-                </a:solidFill>
-                <a:latin typeface="BC Sans"/>
-                <a:ea typeface="Verdana" panose="020B0604030504040204" pitchFamily="34" charset="0"/>
-                <a:cs typeface="Verdana" panose="020B0604030504040204" pitchFamily="34" charset="0"/>
-              </a:rPr>
-              <a:t>Number of units: {{</a:t>
-            </a:r>
-            <a:r>
-              <a:rPr lang="en-US" sz="1400" dirty="0" err="1">
-                <a:solidFill>
-                  <a:srgbClr val="3B305B"/>
-                </a:solidFill>
-                <a:latin typeface="BC Sans"/>
-                <a:ea typeface="Verdana" panose="020B0604030504040204" pitchFamily="34" charset="0"/>
-                <a:cs typeface="Verdana" panose="020B0604030504040204" pitchFamily="34" charset="0"/>
-              </a:rPr>
-              <a:t>TotalUnits</a:t>
-            </a:r>
-            <a:r>
-              <a:rPr lang="en-US" sz="1400" dirty="0">
-                <a:solidFill>
-                  <a:srgbClr val="3B305B"/>
-                </a:solidFill>
-                <a:latin typeface="BC Sans"/>
-                <a:ea typeface="Verdana" panose="020B0604030504040204" pitchFamily="34" charset="0"/>
-                <a:cs typeface="Verdana" panose="020B0604030504040204" pitchFamily="34" charset="0"/>
-              </a:rPr>
-              <a:t>}}</a:t>
-            </a:r>
-          </a:p>
-          <a:p>
-            <a:pPr>
-              <a:lnSpc>
-                <a:spcPct val="110000"/>
+                <a:spcPct val="150000"/>
               </a:lnSpc>
               <a:spcBef>
                 <a:spcPts val="600"/>
@@ -4296,7 +4325,7 @@
           <a:p>
             <a:pPr>
               <a:lnSpc>
-                <a:spcPct val="110000"/>
+                <a:spcPct val="150000"/>
               </a:lnSpc>
               <a:spcBef>
                 <a:spcPts val="600"/>

--- a/ALR-DocgenTemplates/CertificateBackground_SU.pptx
+++ b/ALR-DocgenTemplates/CertificateBackground_SU.pptx
@@ -112,35 +112,6 @@
 </p:presentation>
 </file>
 
-<file path=ppt/changesInfos/changesInfo1.xml><?xml version="1.0" encoding="utf-8"?>
-<pc:chgInfo xmlns:a="http://schemas.openxmlformats.org/drawingml/2006/main" xmlns:r="http://schemas.openxmlformats.org/officeDocument/2006/relationships" xmlns:ac="http://schemas.microsoft.com/office/drawing/2013/main/command" xmlns:pc="http://schemas.microsoft.com/office/powerpoint/2013/main/command">
-  <pc:docChgLst>
-    <pc:chgData name="Narendra Patil, Kiran" userId="bd8726b3-9de5-4981-82ea-44e4ceaf49c4" providerId="ADAL" clId="{AEC3F5A0-79AE-4B5E-8160-C5BDCC55510A}"/>
-    <pc:docChg chg="modSld">
-      <pc:chgData name="Narendra Patil, Kiran" userId="bd8726b3-9de5-4981-82ea-44e4ceaf49c4" providerId="ADAL" clId="{AEC3F5A0-79AE-4B5E-8160-C5BDCC55510A}" dt="2024-08-07T10:09:43.513" v="8" actId="20577"/>
-      <pc:docMkLst>
-        <pc:docMk/>
-      </pc:docMkLst>
-      <pc:sldChg chg="modSp mod">
-        <pc:chgData name="Narendra Patil, Kiran" userId="bd8726b3-9de5-4981-82ea-44e4ceaf49c4" providerId="ADAL" clId="{AEC3F5A0-79AE-4B5E-8160-C5BDCC55510A}" dt="2024-08-07T10:09:43.513" v="8" actId="20577"/>
-        <pc:sldMkLst>
-          <pc:docMk/>
-          <pc:sldMk cId="1830213082" sldId="256"/>
-        </pc:sldMkLst>
-        <pc:spChg chg="mod">
-          <ac:chgData name="Narendra Patil, Kiran" userId="bd8726b3-9de5-4981-82ea-44e4ceaf49c4" providerId="ADAL" clId="{AEC3F5A0-79AE-4B5E-8160-C5BDCC55510A}" dt="2024-08-07T10:09:43.513" v="8" actId="20577"/>
-          <ac:spMkLst>
-            <pc:docMk/>
-            <pc:sldMk cId="1830213082" sldId="256"/>
-            <ac:spMk id="9" creationId="{2661C2CE-7AAD-2E59-A527-EDBEF23061BD}"/>
-          </ac:spMkLst>
-        </pc:spChg>
-      </pc:sldChg>
-    </pc:docChg>
-  </pc:docChgLst>
-</pc:chgInfo>
-</file>
-
 <file path=ppt/slideLayouts/slideLayout1.xml><?xml version="1.0" encoding="utf-8"?>
 <p:sldLayout xmlns:a="http://schemas.openxmlformats.org/drawingml/2006/main" xmlns:r="http://schemas.openxmlformats.org/officeDocument/2006/relationships" xmlns:p="http://schemas.openxmlformats.org/presentationml/2006/main" type="title" preserve="1">
   <p:cSld name="Title Slide">
@@ -272,7 +243,7 @@
           <a:p>
             <a:fld id="{E0C45857-5204-4055-BBBB-5D81F6C0DEE1}" type="datetimeFigureOut">
               <a:rPr lang="en-US" smtClean="0"/>
-              <a:t>7/29/2026</a:t>
+              <a:t>7/31/2026</a:t>
             </a:fld>
             <a:endParaRPr lang="en-US"/>
           </a:p>
@@ -442,7 +413,7 @@
           <a:p>
             <a:fld id="{E0C45857-5204-4055-BBBB-5D81F6C0DEE1}" type="datetimeFigureOut">
               <a:rPr lang="en-US" smtClean="0"/>
-              <a:t>7/29/2026</a:t>
+              <a:t>7/31/2026</a:t>
             </a:fld>
             <a:endParaRPr lang="en-US"/>
           </a:p>
@@ -622,7 +593,7 @@
           <a:p>
             <a:fld id="{E0C45857-5204-4055-BBBB-5D81F6C0DEE1}" type="datetimeFigureOut">
               <a:rPr lang="en-US" smtClean="0"/>
-              <a:t>7/29/2026</a:t>
+              <a:t>7/31/2026</a:t>
             </a:fld>
             <a:endParaRPr lang="en-US"/>
           </a:p>
@@ -792,7 +763,7 @@
           <a:p>
             <a:fld id="{E0C45857-5204-4055-BBBB-5D81F6C0DEE1}" type="datetimeFigureOut">
               <a:rPr lang="en-US" smtClean="0"/>
-              <a:t>7/29/2026</a:t>
+              <a:t>7/31/2026</a:t>
             </a:fld>
             <a:endParaRPr lang="en-US"/>
           </a:p>
@@ -1036,7 +1007,7 @@
           <a:p>
             <a:fld id="{E0C45857-5204-4055-BBBB-5D81F6C0DEE1}" type="datetimeFigureOut">
               <a:rPr lang="en-US" smtClean="0"/>
-              <a:t>7/29/2026</a:t>
+              <a:t>7/31/2026</a:t>
             </a:fld>
             <a:endParaRPr lang="en-US"/>
           </a:p>
@@ -1268,7 +1239,7 @@
           <a:p>
             <a:fld id="{E0C45857-5204-4055-BBBB-5D81F6C0DEE1}" type="datetimeFigureOut">
               <a:rPr lang="en-US" smtClean="0"/>
-              <a:t>7/29/2026</a:t>
+              <a:t>7/31/2026</a:t>
             </a:fld>
             <a:endParaRPr lang="en-US"/>
           </a:p>
@@ -1635,7 +1606,7 @@
           <a:p>
             <a:fld id="{E0C45857-5204-4055-BBBB-5D81F6C0DEE1}" type="datetimeFigureOut">
               <a:rPr lang="en-US" smtClean="0"/>
-              <a:t>7/29/2026</a:t>
+              <a:t>7/31/2026</a:t>
             </a:fld>
             <a:endParaRPr lang="en-US"/>
           </a:p>
@@ -1753,7 +1724,7 @@
           <a:p>
             <a:fld id="{E0C45857-5204-4055-BBBB-5D81F6C0DEE1}" type="datetimeFigureOut">
               <a:rPr lang="en-US" smtClean="0"/>
-              <a:t>7/29/2026</a:t>
+              <a:t>7/31/2026</a:t>
             </a:fld>
             <a:endParaRPr lang="en-US"/>
           </a:p>
@@ -1848,7 +1819,7 @@
           <a:p>
             <a:fld id="{E0C45857-5204-4055-BBBB-5D81F6C0DEE1}" type="datetimeFigureOut">
               <a:rPr lang="en-US" smtClean="0"/>
-              <a:t>7/29/2026</a:t>
+              <a:t>7/31/2026</a:t>
             </a:fld>
             <a:endParaRPr lang="en-US"/>
           </a:p>
@@ -2125,7 +2096,7 @@
           <a:p>
             <a:fld id="{E0C45857-5204-4055-BBBB-5D81F6C0DEE1}" type="datetimeFigureOut">
               <a:rPr lang="en-US" smtClean="0"/>
-              <a:t>7/29/2026</a:t>
+              <a:t>7/31/2026</a:t>
             </a:fld>
             <a:endParaRPr lang="en-US"/>
           </a:p>
@@ -2382,7 +2353,7 @@
           <a:p>
             <a:fld id="{E0C45857-5204-4055-BBBB-5D81F6C0DEE1}" type="datetimeFigureOut">
               <a:rPr lang="en-US" smtClean="0"/>
-              <a:t>7/29/2026</a:t>
+              <a:t>7/31/2026</a:t>
             </a:fld>
             <a:endParaRPr lang="en-US"/>
           </a:p>
@@ -2595,7 +2566,7 @@
           <a:p>
             <a:fld id="{E0C45857-5204-4055-BBBB-5D81F6C0DEE1}" type="datetimeFigureOut">
               <a:rPr lang="en-US" smtClean="0"/>
-              <a:t>7/29/2026</a:t>
+              <a:t>7/31/2026</a:t>
             </a:fld>
             <a:endParaRPr lang="en-US"/>
           </a:p>
@@ -3792,7 +3763,7 @@
           <a:lstStyle/>
           <a:p>
             <a:r>
-              <a:rPr lang="en-US" sz="1400" b="1" dirty="0">
+              <a:rPr lang="en-US" sz="1400" b="1">
                 <a:solidFill>
                   <a:srgbClr val="3B305B"/>
                 </a:solidFill>
@@ -3800,7 +3771,7 @@
                 <a:ea typeface="Verdana" panose="020B0604030504040204" pitchFamily="34" charset="0"/>
                 <a:cs typeface="Verdana" panose="020B0604030504040204" pitchFamily="34" charset="0"/>
               </a:rPr>
-              <a:t>  {{</a:t>
+              <a:t>   {{</a:t>
             </a:r>
             <a:r>
               <a:rPr lang="en-US" sz="1400" b="1" dirty="0" err="1">

--- a/ALR-DocgenTemplates/CertificateBackground_SU.pptx
+++ b/ALR-DocgenTemplates/CertificateBackground_SU.pptx
@@ -112,35 +112,6 @@
 </p:presentation>
 </file>
 
-<file path=ppt/changesInfos/changesInfo1.xml><?xml version="1.0" encoding="utf-8"?>
-<pc:chgInfo xmlns:a="http://schemas.openxmlformats.org/drawingml/2006/main" xmlns:r="http://schemas.openxmlformats.org/officeDocument/2006/relationships" xmlns:ac="http://schemas.microsoft.com/office/drawing/2013/main/command" xmlns:pc="http://schemas.microsoft.com/office/powerpoint/2013/main/command">
-  <pc:docChgLst>
-    <pc:chgData name="Narendra Patil, Kiran" userId="bd8726b3-9de5-4981-82ea-44e4ceaf49c4" providerId="ADAL" clId="{AEC3F5A0-79AE-4B5E-8160-C5BDCC55510A}"/>
-    <pc:docChg chg="modSld">
-      <pc:chgData name="Narendra Patil, Kiran" userId="bd8726b3-9de5-4981-82ea-44e4ceaf49c4" providerId="ADAL" clId="{AEC3F5A0-79AE-4B5E-8160-C5BDCC55510A}" dt="2024-08-07T10:09:43.513" v="8" actId="20577"/>
-      <pc:docMkLst>
-        <pc:docMk/>
-      </pc:docMkLst>
-      <pc:sldChg chg="modSp mod">
-        <pc:chgData name="Narendra Patil, Kiran" userId="bd8726b3-9de5-4981-82ea-44e4ceaf49c4" providerId="ADAL" clId="{AEC3F5A0-79AE-4B5E-8160-C5BDCC55510A}" dt="2024-08-07T10:09:43.513" v="8" actId="20577"/>
-        <pc:sldMkLst>
-          <pc:docMk/>
-          <pc:sldMk cId="1830213082" sldId="256"/>
-        </pc:sldMkLst>
-        <pc:spChg chg="mod">
-          <ac:chgData name="Narendra Patil, Kiran" userId="bd8726b3-9de5-4981-82ea-44e4ceaf49c4" providerId="ADAL" clId="{AEC3F5A0-79AE-4B5E-8160-C5BDCC55510A}" dt="2024-08-07T10:09:43.513" v="8" actId="20577"/>
-          <ac:spMkLst>
-            <pc:docMk/>
-            <pc:sldMk cId="1830213082" sldId="256"/>
-            <ac:spMk id="9" creationId="{2661C2CE-7AAD-2E59-A527-EDBEF23061BD}"/>
-          </ac:spMkLst>
-        </pc:spChg>
-      </pc:sldChg>
-    </pc:docChg>
-  </pc:docChgLst>
-</pc:chgInfo>
-</file>
-
 <file path=ppt/slideLayouts/slideLayout1.xml><?xml version="1.0" encoding="utf-8"?>
 <p:sldLayout xmlns:a="http://schemas.openxmlformats.org/drawingml/2006/main" xmlns:r="http://schemas.openxmlformats.org/officeDocument/2006/relationships" xmlns:p="http://schemas.openxmlformats.org/presentationml/2006/main" type="title" preserve="1">
   <p:cSld name="Title Slide">
@@ -272,7 +243,7 @@
           <a:p>
             <a:fld id="{E0C45857-5204-4055-BBBB-5D81F6C0DEE1}" type="datetimeFigureOut">
               <a:rPr lang="en-US" smtClean="0"/>
-              <a:t>9/2/2025</a:t>
+              <a:t>7/31/2026</a:t>
             </a:fld>
             <a:endParaRPr lang="en-US"/>
           </a:p>
@@ -442,7 +413,7 @@
           <a:p>
             <a:fld id="{E0C45857-5204-4055-BBBB-5D81F6C0DEE1}" type="datetimeFigureOut">
               <a:rPr lang="en-US" smtClean="0"/>
-              <a:t>9/2/2025</a:t>
+              <a:t>7/31/2026</a:t>
             </a:fld>
             <a:endParaRPr lang="en-US"/>
           </a:p>
@@ -622,7 +593,7 @@
           <a:p>
             <a:fld id="{E0C45857-5204-4055-BBBB-5D81F6C0DEE1}" type="datetimeFigureOut">
               <a:rPr lang="en-US" smtClean="0"/>
-              <a:t>9/2/2025</a:t>
+              <a:t>7/31/2026</a:t>
             </a:fld>
             <a:endParaRPr lang="en-US"/>
           </a:p>
@@ -792,7 +763,7 @@
           <a:p>
             <a:fld id="{E0C45857-5204-4055-BBBB-5D81F6C0DEE1}" type="datetimeFigureOut">
               <a:rPr lang="en-US" smtClean="0"/>
-              <a:t>9/2/2025</a:t>
+              <a:t>7/31/2026</a:t>
             </a:fld>
             <a:endParaRPr lang="en-US"/>
           </a:p>
@@ -1036,7 +1007,7 @@
           <a:p>
             <a:fld id="{E0C45857-5204-4055-BBBB-5D81F6C0DEE1}" type="datetimeFigureOut">
               <a:rPr lang="en-US" smtClean="0"/>
-              <a:t>9/2/2025</a:t>
+              <a:t>7/31/2026</a:t>
             </a:fld>
             <a:endParaRPr lang="en-US"/>
           </a:p>
@@ -1268,7 +1239,7 @@
           <a:p>
             <a:fld id="{E0C45857-5204-4055-BBBB-5D81F6C0DEE1}" type="datetimeFigureOut">
               <a:rPr lang="en-US" smtClean="0"/>
-              <a:t>9/2/2025</a:t>
+              <a:t>7/31/2026</a:t>
             </a:fld>
             <a:endParaRPr lang="en-US"/>
           </a:p>
@@ -1635,7 +1606,7 @@
           <a:p>
             <a:fld id="{E0C45857-5204-4055-BBBB-5D81F6C0DEE1}" type="datetimeFigureOut">
               <a:rPr lang="en-US" smtClean="0"/>
-              <a:t>9/2/2025</a:t>
+              <a:t>7/31/2026</a:t>
             </a:fld>
             <a:endParaRPr lang="en-US"/>
           </a:p>
@@ -1753,7 +1724,7 @@
           <a:p>
             <a:fld id="{E0C45857-5204-4055-BBBB-5D81F6C0DEE1}" type="datetimeFigureOut">
               <a:rPr lang="en-US" smtClean="0"/>
-              <a:t>9/2/2025</a:t>
+              <a:t>7/31/2026</a:t>
             </a:fld>
             <a:endParaRPr lang="en-US"/>
           </a:p>
@@ -1848,7 +1819,7 @@
           <a:p>
             <a:fld id="{E0C45857-5204-4055-BBBB-5D81F6C0DEE1}" type="datetimeFigureOut">
               <a:rPr lang="en-US" smtClean="0"/>
-              <a:t>9/2/2025</a:t>
+              <a:t>7/31/2026</a:t>
             </a:fld>
             <a:endParaRPr lang="en-US"/>
           </a:p>
@@ -2125,7 +2096,7 @@
           <a:p>
             <a:fld id="{E0C45857-5204-4055-BBBB-5D81F6C0DEE1}" type="datetimeFigureOut">
               <a:rPr lang="en-US" smtClean="0"/>
-              <a:t>9/2/2025</a:t>
+              <a:t>7/31/2026</a:t>
             </a:fld>
             <a:endParaRPr lang="en-US"/>
           </a:p>
@@ -2382,7 +2353,7 @@
           <a:p>
             <a:fld id="{E0C45857-5204-4055-BBBB-5D81F6C0DEE1}" type="datetimeFigureOut">
               <a:rPr lang="en-US" smtClean="0"/>
-              <a:t>9/2/2025</a:t>
+              <a:t>7/31/2026</a:t>
             </a:fld>
             <a:endParaRPr lang="en-US"/>
           </a:p>
@@ -2595,7 +2566,7 @@
           <a:p>
             <a:fld id="{E0C45857-5204-4055-BBBB-5D81F6C0DEE1}" type="datetimeFigureOut">
               <a:rPr lang="en-US" smtClean="0"/>
-              <a:t>9/2/2025</a:t>
+              <a:t>7/31/2026</a:t>
             </a:fld>
             <a:endParaRPr lang="en-US"/>
           </a:p>
@@ -3076,7 +3047,7 @@
         </p:blipFill>
         <p:spPr bwMode="auto">
           <a:xfrm>
-            <a:off x="-57248" y="16575"/>
+            <a:off x="0" y="-6004"/>
             <a:ext cx="10125076" cy="7784407"/>
           </a:xfrm>
           <a:prstGeom prst="rect">
@@ -3510,7 +3481,7 @@
         <p:spPr>
           <a:xfrm>
             <a:off x="2154614" y="1695910"/>
-            <a:ext cx="7999664" cy="1865382"/>
+            <a:ext cx="7999664" cy="307777"/>
           </a:xfrm>
           <a:prstGeom prst="rect">
             <a:avLst/>
@@ -3528,101 +3499,7 @@
                 <a:spcPts val="5"/>
               </a:spcBef>
             </a:pPr>
-            <a:r>
-              <a:rPr lang="en-US" sz="2400" b="1" dirty="0">
-                <a:solidFill>
-                  <a:srgbClr val="3B305B"/>
-                </a:solidFill>
-                <a:effectLst/>
-                <a:latin typeface="BC Sans"/>
-                <a:ea typeface="Verdana" panose="020B0604030504040204" pitchFamily="34" charset="0"/>
-                <a:cs typeface="Verdana" panose="020B0604030504040204" pitchFamily="34" charset="0"/>
-              </a:rPr>
-              <a:t>{{</a:t>
-            </a:r>
-            <a:r>
-              <a:rPr lang="en-US" sz="2200" b="1" dirty="0" err="1">
-                <a:solidFill>
-                  <a:srgbClr val="3B305B"/>
-                </a:solidFill>
-                <a:effectLst/>
-                <a:latin typeface="BC Sans"/>
-                <a:ea typeface="Verdana" panose="020B0604030504040204" pitchFamily="34" charset="0"/>
-                <a:cs typeface="Verdana" panose="020B0604030504040204" pitchFamily="34" charset="0"/>
-              </a:rPr>
-              <a:t>ResidenceName</a:t>
-            </a:r>
-            <a:r>
-              <a:rPr lang="en-US" sz="2400" b="1" dirty="0">
-                <a:solidFill>
-                  <a:srgbClr val="3B305B"/>
-                </a:solidFill>
-                <a:effectLst/>
-                <a:latin typeface="BC Sans"/>
-                <a:ea typeface="Verdana" panose="020B0604030504040204" pitchFamily="34" charset="0"/>
-                <a:cs typeface="Verdana" panose="020B0604030504040204" pitchFamily="34" charset="0"/>
-              </a:rPr>
-              <a:t>}}</a:t>
-            </a:r>
-          </a:p>
-          <a:p>
-            <a:pPr marL="1497330">
-              <a:spcBef>
-                <a:spcPts val="685"/>
-              </a:spcBef>
-            </a:pPr>
-            <a:r>
-              <a:rPr kumimoji="0" lang="en-US" sz="2000" b="1" i="0" u="none" strike="noStrike" kern="1200" cap="none" spc="0" normalizeH="0" baseline="0" noProof="0" dirty="0">
-                <a:ln>
-                  <a:noFill/>
-                </a:ln>
-                <a:solidFill>
-                  <a:srgbClr val="3B305B"/>
-                </a:solidFill>
-                <a:effectLst/>
-                <a:uLnTx/>
-                <a:uFillTx/>
-                <a:latin typeface="BC Sans"/>
-                <a:ea typeface="Verdana" panose="020B0604030504040204" pitchFamily="34" charset="0"/>
-                <a:cs typeface="Verdana" panose="020B0604030504040204" pitchFamily="34" charset="0"/>
-              </a:rPr>
-              <a:t>{{</a:t>
-            </a:r>
-            <a:r>
-              <a:rPr kumimoji="0" lang="en-US" sz="2000" b="1" i="0" u="none" strike="noStrike" kern="1200" cap="none" spc="0" normalizeH="0" baseline="0" noProof="0" dirty="0" err="1">
-                <a:ln>
-                  <a:noFill/>
-                </a:ln>
-                <a:solidFill>
-                  <a:srgbClr val="3B305B"/>
-                </a:solidFill>
-                <a:effectLst/>
-                <a:uLnTx/>
-                <a:uFillTx/>
-                <a:latin typeface="BC Sans"/>
-                <a:ea typeface="Verdana" panose="020B0604030504040204" pitchFamily="34" charset="0"/>
-                <a:cs typeface="Verdana" panose="020B0604030504040204" pitchFamily="34" charset="0"/>
-              </a:rPr>
-              <a:t>RegistrantName</a:t>
-            </a:r>
-            <a:r>
-              <a:rPr kumimoji="0" lang="en-US" sz="2000" b="1" i="0" u="none" strike="noStrike" kern="1200" cap="none" spc="0" normalizeH="0" baseline="0" noProof="0" dirty="0">
-                <a:ln>
-                  <a:noFill/>
-                </a:ln>
-                <a:solidFill>
-                  <a:srgbClr val="3B305B"/>
-                </a:solidFill>
-                <a:effectLst/>
-                <a:uLnTx/>
-                <a:uFillTx/>
-                <a:latin typeface="BC Sans"/>
-                <a:ea typeface="Verdana" panose="020B0604030504040204" pitchFamily="34" charset="0"/>
-                <a:cs typeface="Verdana" panose="020B0604030504040204" pitchFamily="34" charset="0"/>
-              </a:rPr>
-              <a:t>}}</a:t>
-            </a:r>
-            <a:endParaRPr lang="en-US" sz="2000" dirty="0">
+            <a:endParaRPr lang="en-US" sz="1400" dirty="0">
               <a:solidFill>
                 <a:srgbClr val="3B305B"/>
               </a:solidFill>
@@ -3631,203 +3508,6 @@
               <a:ea typeface="Verdana" panose="020B0604030504040204" pitchFamily="34" charset="0"/>
               <a:cs typeface="Verdana" panose="020B0604030504040204" pitchFamily="34" charset="0"/>
             </a:endParaRPr>
-          </a:p>
-          <a:p>
-            <a:pPr marL="1497330">
-              <a:spcBef>
-                <a:spcPts val="685"/>
-              </a:spcBef>
-              <a:spcAft>
-                <a:spcPts val="0"/>
-              </a:spcAft>
-            </a:pPr>
-            <a:r>
-              <a:rPr lang="en-US" sz="1600" dirty="0">
-                <a:solidFill>
-                  <a:srgbClr val="3B305B"/>
-                </a:solidFill>
-                <a:effectLst/>
-                <a:latin typeface="BC Sans"/>
-                <a:ea typeface="Verdana" panose="020B0604030504040204" pitchFamily="34" charset="0"/>
-                <a:cs typeface="Verdana" panose="020B0604030504040204" pitchFamily="34" charset="0"/>
-              </a:rPr>
-              <a:t>{{</a:t>
-            </a:r>
-            <a:r>
-              <a:rPr lang="en-US" sz="1600" dirty="0" err="1">
-                <a:solidFill>
-                  <a:srgbClr val="3B305B"/>
-                </a:solidFill>
-                <a:effectLst/>
-                <a:latin typeface="BC Sans"/>
-                <a:ea typeface="Verdana" panose="020B0604030504040204" pitchFamily="34" charset="0"/>
-                <a:cs typeface="Verdana" panose="020B0604030504040204" pitchFamily="34" charset="0"/>
-              </a:rPr>
-              <a:t>ResidenceAddress</a:t>
-            </a:r>
-            <a:r>
-              <a:rPr lang="en-US" sz="1600" dirty="0">
-                <a:solidFill>
-                  <a:srgbClr val="3B305B"/>
-                </a:solidFill>
-                <a:effectLst/>
-                <a:latin typeface="BC Sans"/>
-                <a:ea typeface="Verdana" panose="020B0604030504040204" pitchFamily="34" charset="0"/>
-                <a:cs typeface="Verdana" panose="020B0604030504040204" pitchFamily="34" charset="0"/>
-              </a:rPr>
-              <a:t>}}</a:t>
-            </a:r>
-          </a:p>
-          <a:p>
-            <a:pPr marL="1496060" marR="3183255">
-              <a:lnSpc>
-                <a:spcPct val="123000"/>
-              </a:lnSpc>
-              <a:spcBef>
-                <a:spcPts val="515"/>
-              </a:spcBef>
-              <a:spcAft>
-                <a:spcPts val="0"/>
-              </a:spcAft>
-            </a:pPr>
-            <a:r>
-              <a:rPr lang="en-US" sz="1400" dirty="0">
-                <a:solidFill>
-                  <a:srgbClr val="C00000"/>
-                </a:solidFill>
-                <a:effectLst/>
-                <a:latin typeface="BC Sans"/>
-                <a:ea typeface="Verdana" panose="020B0604030504040204" pitchFamily="34" charset="0"/>
-                <a:cs typeface="Verdana" panose="020B0604030504040204" pitchFamily="34" charset="0"/>
-              </a:rPr>
-              <a:t>Class: {{</a:t>
-            </a:r>
-            <a:r>
-              <a:rPr lang="en-US" sz="1400" dirty="0" err="1">
-                <a:solidFill>
-                  <a:srgbClr val="C00000"/>
-                </a:solidFill>
-                <a:effectLst/>
-                <a:latin typeface="BC Sans"/>
-                <a:ea typeface="Verdana" panose="020B0604030504040204" pitchFamily="34" charset="0"/>
-                <a:cs typeface="Verdana" panose="020B0604030504040204" pitchFamily="34" charset="0"/>
-              </a:rPr>
-              <a:t>ResidenceClassType</a:t>
-            </a:r>
-            <a:r>
-              <a:rPr lang="en-US" sz="1400" dirty="0">
-                <a:solidFill>
-                  <a:srgbClr val="C00000"/>
-                </a:solidFill>
-                <a:latin typeface="BC Sans"/>
-                <a:ea typeface="Verdana" panose="020B0604030504040204" pitchFamily="34" charset="0"/>
-                <a:cs typeface="Verdana" panose="020B0604030504040204" pitchFamily="34" charset="0"/>
-              </a:rPr>
-              <a:t>}}</a:t>
-            </a:r>
-            <a:endParaRPr lang="en-US" sz="1400" dirty="0">
-              <a:solidFill>
-                <a:srgbClr val="C00000"/>
-              </a:solidFill>
-              <a:effectLst/>
-              <a:latin typeface="BC Sans"/>
-              <a:ea typeface="Verdana" panose="020B0604030504040204" pitchFamily="34" charset="0"/>
-              <a:cs typeface="Verdana" panose="020B0604030504040204" pitchFamily="34" charset="0"/>
-            </a:endParaRPr>
-          </a:p>
-          <a:p>
-            <a:pPr marL="1496060" marR="3183255">
-              <a:lnSpc>
-                <a:spcPct val="123000"/>
-              </a:lnSpc>
-              <a:spcBef>
-                <a:spcPts val="515"/>
-              </a:spcBef>
-            </a:pPr>
-            <a:r>
-              <a:rPr lang="en-US" sz="1400" dirty="0">
-                <a:solidFill>
-                  <a:srgbClr val="3B305B"/>
-                </a:solidFill>
-                <a:effectLst/>
-                <a:latin typeface="BC Sans"/>
-                <a:ea typeface="Verdana" panose="020B0604030504040204" pitchFamily="34" charset="0"/>
-                <a:cs typeface="Verdana" panose="020B0604030504040204" pitchFamily="34" charset="0"/>
-              </a:rPr>
-              <a:t>Number</a:t>
-            </a:r>
-            <a:r>
-              <a:rPr lang="en-US" sz="1400" spc="200" dirty="0">
-                <a:solidFill>
-                  <a:srgbClr val="3B305B"/>
-                </a:solidFill>
-                <a:effectLst/>
-                <a:latin typeface="BC Sans"/>
-                <a:ea typeface="Verdana" panose="020B0604030504040204" pitchFamily="34" charset="0"/>
-                <a:cs typeface="Verdana" panose="020B0604030504040204" pitchFamily="34" charset="0"/>
-              </a:rPr>
-              <a:t> </a:t>
-            </a:r>
-            <a:r>
-              <a:rPr lang="en-US" sz="1400" dirty="0">
-                <a:solidFill>
-                  <a:srgbClr val="3B305B"/>
-                </a:solidFill>
-                <a:effectLst/>
-                <a:latin typeface="BC Sans"/>
-                <a:ea typeface="Verdana" panose="020B0604030504040204" pitchFamily="34" charset="0"/>
-                <a:cs typeface="Verdana" panose="020B0604030504040204" pitchFamily="34" charset="0"/>
-              </a:rPr>
-              <a:t>of</a:t>
-            </a:r>
-            <a:r>
-              <a:rPr lang="en-US" sz="1400" spc="200" dirty="0">
-                <a:solidFill>
-                  <a:srgbClr val="3B305B"/>
-                </a:solidFill>
-                <a:effectLst/>
-                <a:latin typeface="BC Sans"/>
-                <a:ea typeface="Verdana" panose="020B0604030504040204" pitchFamily="34" charset="0"/>
-                <a:cs typeface="Verdana" panose="020B0604030504040204" pitchFamily="34" charset="0"/>
-              </a:rPr>
-              <a:t> </a:t>
-            </a:r>
-            <a:r>
-              <a:rPr lang="en-US" sz="1400" dirty="0">
-                <a:solidFill>
-                  <a:srgbClr val="3B305B"/>
-                </a:solidFill>
-                <a:effectLst/>
-                <a:latin typeface="BC Sans"/>
-                <a:ea typeface="Verdana" panose="020B0604030504040204" pitchFamily="34" charset="0"/>
-                <a:cs typeface="Verdana" panose="020B0604030504040204" pitchFamily="34" charset="0"/>
-              </a:rPr>
-              <a:t>units: {{</a:t>
-            </a:r>
-            <a:r>
-              <a:rPr lang="en-US" sz="1400" dirty="0" err="1">
-                <a:solidFill>
-                  <a:srgbClr val="3B305B"/>
-                </a:solidFill>
-                <a:effectLst/>
-                <a:latin typeface="BC Sans"/>
-                <a:ea typeface="Verdana" panose="020B0604030504040204" pitchFamily="34" charset="0"/>
-                <a:cs typeface="Verdana" panose="020B0604030504040204" pitchFamily="34" charset="0"/>
-              </a:rPr>
-              <a:t>TotalUnits</a:t>
-            </a:r>
-            <a:r>
-              <a:rPr lang="en-US" sz="1400" dirty="0">
-                <a:solidFill>
-                  <a:srgbClr val="3B305B"/>
-                </a:solidFill>
-                <a:effectLst/>
-                <a:latin typeface="BC Sans"/>
-                <a:ea typeface="Verdana" panose="020B0604030504040204" pitchFamily="34" charset="0"/>
-                <a:cs typeface="Verdana" panose="020B0604030504040204" pitchFamily="34" charset="0"/>
-              </a:rPr>
-              <a:t>}}</a:t>
-            </a:r>
           </a:p>
         </p:txBody>
       </p:sp>
@@ -3845,8 +3525,8 @@
         </p:nvSpPr>
         <p:spPr>
           <a:xfrm>
-            <a:off x="1684421" y="676025"/>
-            <a:ext cx="8469856" cy="430887"/>
+            <a:off x="1512000" y="352800"/>
+            <a:ext cx="8380800" cy="430887"/>
           </a:xfrm>
           <a:prstGeom prst="rect">
             <a:avLst/>
@@ -3985,8 +3665,8 @@
         </p:nvCxnSpPr>
         <p:spPr>
           <a:xfrm>
-            <a:off x="3246120" y="1289304"/>
-            <a:ext cx="6035040" cy="0"/>
+            <a:off x="3096000" y="910800"/>
+            <a:ext cx="6163200" cy="0"/>
           </a:xfrm>
           <a:prstGeom prst="line">
             <a:avLst/>
@@ -4083,7 +3763,7 @@
           <a:lstStyle/>
           <a:p>
             <a:r>
-              <a:rPr lang="en-US" sz="1400" b="1" dirty="0">
+              <a:rPr lang="en-US" sz="1400" b="1">
                 <a:solidFill>
                   <a:srgbClr val="3B305B"/>
                 </a:solidFill>
@@ -4203,7 +3883,7 @@
         <p:spPr>
           <a:xfrm>
             <a:off x="3426793" y="6427723"/>
-            <a:ext cx="2228049" cy="523220"/>
+            <a:ext cx="2442411" cy="523220"/>
           </a:xfrm>
           <a:prstGeom prst="rect">
             <a:avLst/>
@@ -4288,8 +3968,8 @@
         </p:blipFill>
         <p:spPr>
           <a:xfrm>
-            <a:off x="2207164" y="1681641"/>
-            <a:ext cx="1181100" cy="1181100"/>
+            <a:off x="1810800" y="1584000"/>
+            <a:ext cx="1051200" cy="1051200"/>
           </a:xfrm>
           <a:prstGeom prst="rect">
             <a:avLst/>
@@ -4302,10 +3982,10 @@
       </p:pic>
       <p:sp>
         <p:nvSpPr>
-          <p:cNvPr id="17" name="TextBox 8">
+          <p:cNvPr id="4" name="TextBox 3">
             <a:extLst>
               <a:ext uri="{FF2B5EF4-FFF2-40B4-BE49-F238E27FC236}">
-                <a16:creationId xmlns:a16="http://schemas.microsoft.com/office/drawing/2014/main" id="{2661C2CE-7AAD-2E59-A527-EDBEF23061BD}"/>
+                <a16:creationId xmlns:a16="http://schemas.microsoft.com/office/drawing/2014/main" id="{D987C2DB-75E9-BC61-A004-3493C73FB218}"/>
               </a:ext>
             </a:extLst>
           </p:cNvPr>
@@ -4314,8 +3994,8 @@
         </p:nvSpPr>
         <p:spPr>
           <a:xfrm>
-            <a:off x="2144105" y="3722905"/>
-            <a:ext cx="10993954" cy="1212320"/>
+            <a:off x="3027599" y="1123199"/>
+            <a:ext cx="6177600" cy="3560400"/>
           </a:xfrm>
           <a:prstGeom prst="rect">
             <a:avLst/>
@@ -4326,187 +4006,282 @@
           <a:bodyPr wrap="square">
             <a:spAutoFit/>
           </a:bodyPr>
-          <a:lstStyle>
-            <a:defPPr>
-              <a:defRPr lang="en-US"/>
-            </a:defPPr>
-            <a:lvl1pPr marL="0" algn="l" defTabSz="457200" rtl="0" eaLnBrk="1" latinLnBrk="0" hangingPunct="1">
-              <a:defRPr sz="1800" kern="1200">
-                <a:solidFill>
-                  <a:schemeClr val="tx1"/>
-                </a:solidFill>
-                <a:latin typeface="+mn-lt"/>
-                <a:ea typeface="+mn-ea"/>
-                <a:cs typeface="+mn-cs"/>
-              </a:defRPr>
-            </a:lvl1pPr>
-            <a:lvl2pPr marL="457200" algn="l" defTabSz="457200" rtl="0" eaLnBrk="1" latinLnBrk="0" hangingPunct="1">
-              <a:defRPr sz="1800" kern="1200">
-                <a:solidFill>
-                  <a:schemeClr val="tx1"/>
-                </a:solidFill>
-                <a:latin typeface="+mn-lt"/>
-                <a:ea typeface="+mn-ea"/>
-                <a:cs typeface="+mn-cs"/>
-              </a:defRPr>
-            </a:lvl2pPr>
-            <a:lvl3pPr marL="914400" algn="l" defTabSz="457200" rtl="0" eaLnBrk="1" latinLnBrk="0" hangingPunct="1">
-              <a:defRPr sz="1800" kern="1200">
-                <a:solidFill>
-                  <a:schemeClr val="tx1"/>
-                </a:solidFill>
-                <a:latin typeface="+mn-lt"/>
-                <a:ea typeface="+mn-ea"/>
-                <a:cs typeface="+mn-cs"/>
-              </a:defRPr>
-            </a:lvl3pPr>
-            <a:lvl4pPr marL="1371600" algn="l" defTabSz="457200" rtl="0" eaLnBrk="1" latinLnBrk="0" hangingPunct="1">
-              <a:defRPr sz="1800" kern="1200">
-                <a:solidFill>
-                  <a:schemeClr val="tx1"/>
-                </a:solidFill>
-                <a:latin typeface="+mn-lt"/>
-                <a:ea typeface="+mn-ea"/>
-                <a:cs typeface="+mn-cs"/>
-              </a:defRPr>
-            </a:lvl4pPr>
-            <a:lvl5pPr marL="1828800" algn="l" defTabSz="457200" rtl="0" eaLnBrk="1" latinLnBrk="0" hangingPunct="1">
-              <a:defRPr sz="1800" kern="1200">
-                <a:solidFill>
-                  <a:schemeClr val="tx1"/>
-                </a:solidFill>
-                <a:latin typeface="+mn-lt"/>
-                <a:ea typeface="+mn-ea"/>
-                <a:cs typeface="+mn-cs"/>
-              </a:defRPr>
-            </a:lvl5pPr>
-            <a:lvl6pPr marL="2286000" algn="l" defTabSz="457200" rtl="0" eaLnBrk="1" latinLnBrk="0" hangingPunct="1">
-              <a:defRPr sz="1800" kern="1200">
-                <a:solidFill>
-                  <a:schemeClr val="tx1"/>
-                </a:solidFill>
-                <a:latin typeface="+mn-lt"/>
-                <a:ea typeface="+mn-ea"/>
-                <a:cs typeface="+mn-cs"/>
-              </a:defRPr>
-            </a:lvl6pPr>
-            <a:lvl7pPr marL="2743200" algn="l" defTabSz="457200" rtl="0" eaLnBrk="1" latinLnBrk="0" hangingPunct="1">
-              <a:defRPr sz="1800" kern="1200">
-                <a:solidFill>
-                  <a:schemeClr val="tx1"/>
-                </a:solidFill>
-                <a:latin typeface="+mn-lt"/>
-                <a:ea typeface="+mn-ea"/>
-                <a:cs typeface="+mn-cs"/>
-              </a:defRPr>
-            </a:lvl7pPr>
-            <a:lvl8pPr marL="3200400" algn="l" defTabSz="457200" rtl="0" eaLnBrk="1" latinLnBrk="0" hangingPunct="1">
-              <a:defRPr sz="1800" kern="1200">
-                <a:solidFill>
-                  <a:schemeClr val="tx1"/>
-                </a:solidFill>
-                <a:latin typeface="+mn-lt"/>
-                <a:ea typeface="+mn-ea"/>
-                <a:cs typeface="+mn-cs"/>
-              </a:defRPr>
-            </a:lvl8pPr>
-            <a:lvl9pPr marL="3657600" algn="l" defTabSz="457200" rtl="0" eaLnBrk="1" latinLnBrk="0" hangingPunct="1">
-              <a:defRPr sz="1800" kern="1200">
-                <a:solidFill>
-                  <a:schemeClr val="tx1"/>
-                </a:solidFill>
-                <a:latin typeface="+mn-lt"/>
-                <a:ea typeface="+mn-ea"/>
-                <a:cs typeface="+mn-cs"/>
-              </a:defRPr>
-            </a:lvl9pPr>
-          </a:lstStyle>
-          <a:p>
-            <a:pPr marL="1496060" marR="3183255">
+          <a:lstStyle/>
+          <a:p>
+            <a:pPr>
               <a:lnSpc>
-                <a:spcPct val="123000"/>
+                <a:spcPct val="200000"/>
               </a:lnSpc>
-              <a:spcBef>
-                <a:spcPts val="515"/>
-              </a:spcBef>
+              <a:spcAft>
+                <a:spcPts val="300"/>
+              </a:spcAft>
             </a:pPr>
             <a:r>
-              <a:rPr lang="en-US" sz="1400" dirty="0">
+              <a:rPr lang="en-US" sz="1900" b="1" dirty="0">
                 <a:solidFill>
                   <a:srgbClr val="3B305B"/>
                 </a:solidFill>
                 <a:latin typeface="BC Sans"/>
                 <a:ea typeface="Verdana" panose="020B0604030504040204" pitchFamily="34" charset="0"/>
+                <a:cs typeface="Verdana" panose="020B0604030504040204" pitchFamily="34" charset="0"/>
               </a:rPr>
-              <a:t>Assisted Living Service(s): {{</a:t>
-            </a:r>
-            <a:r>
-              <a:rPr lang="en-US" sz="1400" b="0" dirty="0">
-                <a:solidFill>
-                  <a:srgbClr val="C00000"/>
-                </a:solidFill>
-                <a:effectLst/>
-                <a:latin typeface="Consolas" panose="020B0609020204030204" pitchFamily="49" charset="0"/>
-              </a:rPr>
-              <a:t>Services</a:t>
-            </a:r>
-            <a:r>
-              <a:rPr lang="en-US" sz="1400" dirty="0">
+              <a:t>{{</a:t>
+            </a:r>
+            <a:r>
+              <a:rPr lang="en-US" sz="1900" b="1" dirty="0" err="1">
                 <a:solidFill>
                   <a:srgbClr val="3B305B"/>
                 </a:solidFill>
                 <a:latin typeface="BC Sans"/>
                 <a:ea typeface="Verdana" panose="020B0604030504040204" pitchFamily="34" charset="0"/>
+                <a:cs typeface="Verdana" panose="020B0604030504040204" pitchFamily="34" charset="0"/>
+              </a:rPr>
+              <a:t>ResidenceName</a:t>
+            </a:r>
+            <a:r>
+              <a:rPr lang="en-US" sz="1900" b="1" dirty="0">
+                <a:solidFill>
+                  <a:srgbClr val="3B305B"/>
+                </a:solidFill>
+                <a:latin typeface="BC Sans"/>
+                <a:ea typeface="Verdana" panose="020B0604030504040204" pitchFamily="34" charset="0"/>
+                <a:cs typeface="Verdana" panose="020B0604030504040204" pitchFamily="34" charset="0"/>
               </a:rPr>
               <a:t>}}</a:t>
             </a:r>
           </a:p>
           <a:p>
-            <a:pPr marL="1496060" marR="3183255">
+            <a:pPr>
               <a:lnSpc>
-                <a:spcPct val="123000"/>
+                <a:spcPct val="200000"/>
               </a:lnSpc>
-              <a:spcBef>
-                <a:spcPts val="515"/>
-              </a:spcBef>
+              <a:spcAft>
+                <a:spcPts val="300"/>
+              </a:spcAft>
             </a:pPr>
-            <a:endParaRPr lang="en-US" sz="800" dirty="0">
+            <a:r>
+              <a:rPr lang="en-US" sz="1400" b="1" dirty="0">
+                <a:solidFill>
+                  <a:srgbClr val="3B305B"/>
+                </a:solidFill>
+                <a:latin typeface="BC Sans"/>
+                <a:ea typeface="Verdana" panose="020B0604030504040204" pitchFamily="34" charset="0"/>
+                <a:cs typeface="Verdana" panose="020B0604030504040204" pitchFamily="34" charset="0"/>
+              </a:rPr>
+              <a:t>{{</a:t>
+            </a:r>
+            <a:r>
+              <a:rPr lang="en-US" sz="1400" b="1" dirty="0" err="1">
+                <a:solidFill>
+                  <a:srgbClr val="3B305B"/>
+                </a:solidFill>
+                <a:latin typeface="BC Sans"/>
+                <a:ea typeface="Verdana" panose="020B0604030504040204" pitchFamily="34" charset="0"/>
+                <a:cs typeface="Verdana" panose="020B0604030504040204" pitchFamily="34" charset="0"/>
+              </a:rPr>
+              <a:t>RegistrantName</a:t>
+            </a:r>
+            <a:r>
+              <a:rPr lang="en-US" sz="1400" b="1" dirty="0">
+                <a:solidFill>
+                  <a:srgbClr val="3B305B"/>
+                </a:solidFill>
+                <a:latin typeface="BC Sans"/>
+                <a:ea typeface="Verdana" panose="020B0604030504040204" pitchFamily="34" charset="0"/>
+                <a:cs typeface="Verdana" panose="020B0604030504040204" pitchFamily="34" charset="0"/>
+              </a:rPr>
+              <a:t>}}</a:t>
+            </a:r>
+          </a:p>
+          <a:p>
+            <a:pPr>
+              <a:lnSpc>
+                <a:spcPct val="110000"/>
+              </a:lnSpc>
+              <a:spcAft>
+                <a:spcPts val="300"/>
+              </a:spcAft>
+            </a:pPr>
+            <a:r>
+              <a:rPr lang="en-US" sz="1200" dirty="0">
+                <a:solidFill>
+                  <a:srgbClr val="3B305B"/>
+                </a:solidFill>
+                <a:latin typeface="BC Sans"/>
+                <a:ea typeface="Verdana" panose="020B0604030504040204" pitchFamily="34" charset="0"/>
+                <a:cs typeface="Verdana" panose="020B0604030504040204" pitchFamily="34" charset="0"/>
+              </a:rPr>
+              <a:t>{{</a:t>
+            </a:r>
+            <a:r>
+              <a:rPr lang="en-US" sz="1200" dirty="0" err="1">
+                <a:solidFill>
+                  <a:srgbClr val="3B305B"/>
+                </a:solidFill>
+                <a:latin typeface="BC Sans"/>
+                <a:ea typeface="Verdana" panose="020B0604030504040204" pitchFamily="34" charset="0"/>
+                <a:cs typeface="Verdana" panose="020B0604030504040204" pitchFamily="34" charset="0"/>
+              </a:rPr>
+              <a:t>ResidenceAddress</a:t>
+            </a:r>
+            <a:r>
+              <a:rPr lang="en-US" sz="1200" dirty="0">
+                <a:solidFill>
+                  <a:srgbClr val="3B305B"/>
+                </a:solidFill>
+                <a:latin typeface="BC Sans"/>
+                <a:ea typeface="Verdana" panose="020B0604030504040204" pitchFamily="34" charset="0"/>
+                <a:cs typeface="Verdana" panose="020B0604030504040204" pitchFamily="34" charset="0"/>
+              </a:rPr>
+              <a:t>}}</a:t>
+            </a:r>
+          </a:p>
+          <a:p>
+            <a:pPr>
+              <a:lnSpc>
+                <a:spcPct val="110000"/>
+              </a:lnSpc>
+              <a:spcAft>
+                <a:spcPts val="300"/>
+              </a:spcAft>
+            </a:pPr>
+            <a:endParaRPr lang="en-US" sz="1200" dirty="0">
               <a:solidFill>
                 <a:srgbClr val="3B305B"/>
               </a:solidFill>
               <a:latin typeface="BC Sans"/>
               <a:ea typeface="Verdana" panose="020B0604030504040204" pitchFamily="34" charset="0"/>
+              <a:cs typeface="Verdana" panose="020B0604030504040204" pitchFamily="34" charset="0"/>
             </a:endParaRPr>
           </a:p>
           <a:p>
-            <a:pPr marL="1496060" marR="3183255">
+            <a:pPr>
               <a:lnSpc>
-                <a:spcPct val="123000"/>
+                <a:spcPct val="150000"/>
+              </a:lnSpc>
+              <a:spcAft>
+                <a:spcPts val="300"/>
+              </a:spcAft>
+            </a:pPr>
+            <a:r>
+              <a:rPr lang="en-US" sz="1400" dirty="0">
+                <a:solidFill>
+                  <a:srgbClr val="C00000"/>
+                </a:solidFill>
+                <a:latin typeface="BC Sans"/>
+                <a:ea typeface="Verdana" panose="020B0604030504040204" pitchFamily="34" charset="0"/>
+                <a:cs typeface="Verdana" panose="020B0604030504040204" pitchFamily="34" charset="0"/>
+              </a:rPr>
+              <a:t>Class: {{</a:t>
+            </a:r>
+            <a:r>
+              <a:rPr lang="en-US" sz="1400" dirty="0" err="1">
+                <a:solidFill>
+                  <a:srgbClr val="C00000"/>
+                </a:solidFill>
+                <a:latin typeface="BC Sans"/>
+                <a:ea typeface="Verdana" panose="020B0604030504040204" pitchFamily="34" charset="0"/>
+                <a:cs typeface="Verdana" panose="020B0604030504040204" pitchFamily="34" charset="0"/>
+              </a:rPr>
+              <a:t>ResidenceClassType</a:t>
+            </a:r>
+            <a:r>
+              <a:rPr lang="en-US" sz="1400" dirty="0">
+                <a:solidFill>
+                  <a:srgbClr val="C00000"/>
+                </a:solidFill>
+                <a:latin typeface="BC Sans"/>
+                <a:ea typeface="Verdana" panose="020B0604030504040204" pitchFamily="34" charset="0"/>
+                <a:cs typeface="Verdana" panose="020B0604030504040204" pitchFamily="34" charset="0"/>
+              </a:rPr>
+              <a:t>}}</a:t>
+            </a:r>
+          </a:p>
+          <a:p>
+            <a:pPr>
+              <a:lnSpc>
+                <a:spcPct val="150000"/>
+              </a:lnSpc>
+              <a:spcAft>
+                <a:spcPts val="300"/>
+              </a:spcAft>
+            </a:pPr>
+            <a:r>
+              <a:rPr lang="en-US" sz="1400" dirty="0">
+                <a:solidFill>
+                  <a:srgbClr val="3B305B"/>
+                </a:solidFill>
+                <a:latin typeface="BC Sans"/>
+                <a:ea typeface="Verdana" panose="020B0604030504040204" pitchFamily="34" charset="0"/>
+                <a:cs typeface="Verdana" panose="020B0604030504040204" pitchFamily="34" charset="0"/>
+              </a:rPr>
+              <a:t>Number of units: </a:t>
+            </a:r>
+            <a:r>
+              <a:rPr lang="en-US" sz="1400" b="1" dirty="0">
+                <a:solidFill>
+                  <a:srgbClr val="3B305B"/>
+                </a:solidFill>
+                <a:latin typeface="BC Sans"/>
+                <a:ea typeface="Verdana" panose="020B0604030504040204" pitchFamily="34" charset="0"/>
+                <a:cs typeface="Verdana" panose="020B0604030504040204" pitchFamily="34" charset="0"/>
+              </a:rPr>
+              <a:t>{{</a:t>
+            </a:r>
+            <a:r>
+              <a:rPr lang="en-US" sz="1400" b="1" dirty="0" err="1">
+                <a:solidFill>
+                  <a:srgbClr val="3B305B"/>
+                </a:solidFill>
+                <a:latin typeface="BC Sans"/>
+                <a:ea typeface="Verdana" panose="020B0604030504040204" pitchFamily="34" charset="0"/>
+                <a:cs typeface="Verdana" panose="020B0604030504040204" pitchFamily="34" charset="0"/>
+              </a:rPr>
+              <a:t>TotalUnits</a:t>
+            </a:r>
+            <a:r>
+              <a:rPr lang="en-US" sz="1400" b="1" dirty="0">
+                <a:solidFill>
+                  <a:srgbClr val="3B305B"/>
+                </a:solidFill>
+                <a:latin typeface="BC Sans"/>
+                <a:ea typeface="Verdana" panose="020B0604030504040204" pitchFamily="34" charset="0"/>
+                <a:cs typeface="Verdana" panose="020B0604030504040204" pitchFamily="34" charset="0"/>
+              </a:rPr>
+              <a:t>}}</a:t>
+            </a:r>
+          </a:p>
+          <a:p>
+            <a:pPr>
+              <a:lnSpc>
+                <a:spcPct val="150000"/>
               </a:lnSpc>
               <a:spcBef>
-                <a:spcPts val="515"/>
+                <a:spcPts val="600"/>
               </a:spcBef>
+              <a:spcAft>
+                <a:spcPts val="300"/>
+              </a:spcAft>
             </a:pPr>
             <a:r>
-              <a:rPr lang="en-US" sz="1400" b="1" dirty="0">
+              <a:rPr lang="en-US" sz="1400" dirty="0">
                 <a:solidFill>
                   <a:srgbClr val="3B305B"/>
                 </a:solidFill>
                 <a:latin typeface="BC Sans"/>
                 <a:ea typeface="Verdana" panose="020B0604030504040204" pitchFamily="34" charset="0"/>
               </a:rPr>
-              <a:t>CONDITIONS:</a:t>
-            </a:r>
-          </a:p>
-          <a:p>
-            <a:pPr marL="1496060" marR="3183255">
-              <a:lnSpc>
-                <a:spcPct val="123000"/>
-              </a:lnSpc>
-              <a:spcBef>
-                <a:spcPts val="515"/>
-              </a:spcBef>
-            </a:pPr>
+              <a:t>Assisted Living Service(s): {{</a:t>
+            </a:r>
+            <a:r>
+              <a:rPr lang="en-US" sz="1400" dirty="0">
+                <a:solidFill>
+                  <a:srgbClr val="A31515"/>
+                </a:solidFill>
+                <a:latin typeface="Consolas" panose="020B0609020204030204" pitchFamily="49" charset="0"/>
+              </a:rPr>
+              <a:t>Services</a:t>
+            </a:r>
             <a:r>
               <a:rPr lang="en-US" sz="1400" dirty="0">
                 <a:solidFill>
@@ -4515,15 +4290,61 @@
                 <a:latin typeface="BC Sans"/>
                 <a:ea typeface="Verdana" panose="020B0604030504040204" pitchFamily="34" charset="0"/>
               </a:rPr>
-              <a:t>{{</a:t>
-            </a:r>
-            <a:r>
-              <a:rPr lang="en-US" sz="1400" dirty="0" err="1">
+              <a:t>}}</a:t>
+            </a:r>
+          </a:p>
+          <a:p>
+            <a:pPr>
+              <a:lnSpc>
+                <a:spcPct val="150000"/>
+              </a:lnSpc>
+              <a:spcBef>
+                <a:spcPts val="600"/>
+              </a:spcBef>
+              <a:spcAft>
+                <a:spcPts val="300"/>
+              </a:spcAft>
+            </a:pPr>
+            <a:r>
+              <a:rPr lang="en-US" sz="1400" b="1" dirty="0">
                 <a:solidFill>
                   <a:srgbClr val="3B305B"/>
                 </a:solidFill>
                 <a:latin typeface="BC Sans"/>
                 <a:ea typeface="Verdana" panose="020B0604030504040204" pitchFamily="34" charset="0"/>
+                <a:cs typeface="Verdana" panose="020B0604030504040204" pitchFamily="34" charset="0"/>
+              </a:rPr>
+              <a:t>CONDITIONS:</a:t>
+            </a:r>
+          </a:p>
+          <a:p>
+            <a:pPr>
+              <a:lnSpc>
+                <a:spcPct val="110000"/>
+              </a:lnSpc>
+              <a:spcAft>
+                <a:spcPts val="300"/>
+              </a:spcAft>
+            </a:pPr>
+            <a:r>
+              <a:rPr lang="en-US" sz="1400" dirty="0">
+                <a:solidFill>
+                  <a:srgbClr val="3B305B"/>
+                </a:solidFill>
+                <a:latin typeface="BC Sans"/>
+                <a:ea typeface="Verdana" panose="020B0604030504040204" pitchFamily="34" charset="0"/>
+                <a:cs typeface="Verdana" panose="020B0604030504040204" pitchFamily="34" charset="0"/>
+              </a:rPr>
+              <a:t>{{</a:t>
+            </a:r>
+            <a:r>
+              <a:rPr lang="en-US" sz="1400" dirty="0" err="1">
+                <a:solidFill>
+                  <a:srgbClr val="3B305B"/>
+                </a:solidFill>
+                <a:latin typeface="BC Sans"/>
+                <a:ea typeface="Verdana" panose="020B0604030504040204" pitchFamily="34" charset="0"/>
+                <a:cs typeface="Verdana" panose="020B0604030504040204" pitchFamily="34" charset="0"/>
               </a:rPr>
               <a:t>ConditionAndDescription</a:t>
             </a:r>
@@ -4534,15 +4355,10 @@
                 </a:solidFill>
                 <a:latin typeface="BC Sans"/>
                 <a:ea typeface="Verdana" panose="020B0604030504040204" pitchFamily="34" charset="0"/>
+                <a:cs typeface="Verdana" panose="020B0604030504040204" pitchFamily="34" charset="0"/>
               </a:rPr>
               <a:t>}} {{ConditionAndDescription1}}</a:t>
             </a:r>
-            <a:endParaRPr lang="en-CA" sz="800" dirty="0">
-              <a:effectLst/>
-              <a:latin typeface="BC Sans"/>
-              <a:ea typeface="Verdana" panose="020B0604030504040204" pitchFamily="34" charset="0"/>
-              <a:cs typeface="Verdana" panose="020B0604030504040204" pitchFamily="34" charset="0"/>
-            </a:endParaRPr>
           </a:p>
         </p:txBody>
       </p:sp>
